--- a/presentations/Final_Project_Presentation_v3 (1).pptx
+++ b/presentations/Final_Project_Presentation_v3 (1).pptx
@@ -14,10 +14,10 @@
     <p:sldId id="259" r:id="rId5"/>
     <p:sldId id="260" r:id="rId6"/>
     <p:sldId id="261" r:id="rId7"/>
-    <p:sldId id="262" r:id="rId8"/>
-    <p:sldId id="270" r:id="rId9"/>
-    <p:sldId id="271" r:id="rId10"/>
-    <p:sldId id="272" r:id="rId11"/>
+    <p:sldId id="270" r:id="rId8"/>
+    <p:sldId id="271" r:id="rId9"/>
+    <p:sldId id="272" r:id="rId10"/>
+    <p:sldId id="262" r:id="rId11"/>
     <p:sldId id="263" r:id="rId12"/>
     <p:sldId id="264" r:id="rId13"/>
   </p:sldIdLst>
@@ -1448,7 +1448,7 @@
           <a:p>
             <a:fld id="{F7021451-1387-4CA6-816F-3879F97B5CBC}" type="slidenum">
               <a:rPr lang="en-US"/>
-              <a:t>7</a:t>
+              <a:t>10</a:t>
             </a:fld>
             <a:endParaRPr lang="en-US"/>
           </a:p>
@@ -2346,7 +2346,7 @@
 
 <file path=ppt/slides/slide10.xml><?xml version="1.0" encoding="utf-8"?>
 <p:sld xmlns:a="http://schemas.openxmlformats.org/drawingml/2006/main" xmlns:r="http://schemas.openxmlformats.org/officeDocument/2006/relationships" xmlns:p="http://schemas.openxmlformats.org/presentationml/2006/main">
-  <p:cSld name="Slide 12">
+  <p:cSld name="Slide 7">
     <p:bg>
       <p:bgPr>
         <a:solidFill>
@@ -2371,7 +2371,7 @@
       </p:grpSpPr>
       <p:sp>
         <p:nvSpPr>
-          <p:cNvPr id="2" name="label"/>
+          <p:cNvPr id="2" name="Text 0"/>
           <p:cNvSpPr/>
           <p:nvPr/>
         </p:nvSpPr>
@@ -2399,22 +2399,25 @@
                   <a:srgbClr val="2DD4BF"/>
                 </a:solidFill>
                 <a:latin typeface="Calibri" pitchFamily="34" charset="0"/>
-              </a:rPr>
-              <a:t>08  ·  TASK 4 RESULTS  —  ANOMALY SCORES BY FUEL TYPE &amp; GEOGRAPHY</a:t>
-            </a:r>
-          </a:p>
-        </p:txBody>
-      </p:sp>
-      <p:sp>
-        <p:nvSpPr>
-          <p:cNvPr id="3" name="title"/>
+                <a:ea typeface="Calibri" pitchFamily="34" charset="-122"/>
+                <a:cs typeface="Calibri" pitchFamily="34" charset="-120"/>
+              </a:rPr>
+              <a:t>09  ·  LIMITATIONS</a:t>
+            </a:r>
+            <a:endParaRPr lang="en-US" sz="1000" dirty="0"/>
+          </a:p>
+        </p:txBody>
+      </p:sp>
+      <p:sp>
+        <p:nvSpPr>
+          <p:cNvPr id="3" name="Text 1"/>
           <p:cNvSpPr/>
           <p:nvPr/>
         </p:nvSpPr>
         <p:spPr>
           <a:xfrm>
             <a:off x="457200" y="548640"/>
-            <a:ext cx="11247120" cy="548640"/>
+            <a:ext cx="11247120" cy="777240"/>
           </a:xfrm>
           <a:prstGeom prst="rect">
             <a:avLst/>
@@ -2435,46 +2438,25 @@
                   <a:srgbClr val="E2E8F0"/>
                 </a:solidFill>
                 <a:latin typeface="Georgia" pitchFamily="34" charset="0"/>
-              </a:rPr>
-              <a:t>NUCLEAR and COAL carry the highest anomaly scores</a:t>
-            </a:r>
-          </a:p>
-        </p:txBody>
-      </p:sp>
-      <p:pic>
-        <p:nvPicPr>
-          <p:cNvPr id="4" name="fuel_chart"/>
-          <p:cNvPicPr>
-            <a:picLocks noChangeAspect="1"/>
-          </p:cNvPicPr>
-          <p:nvPr/>
-        </p:nvPicPr>
-        <p:blipFill>
-          <a:blip r:embed="rId2"/>
-          <a:stretch>
-            <a:fillRect/>
-          </a:stretch>
-        </p:blipFill>
-        <p:spPr>
-          <a:xfrm>
-            <a:off x="457200" y="1371600"/>
-            <a:ext cx="8494036" cy="2950000"/>
-          </a:xfrm>
-          <a:prstGeom prst="rect">
-            <a:avLst/>
-          </a:prstGeom>
-        </p:spPr>
-      </p:pic>
-      <p:sp>
-        <p:nvSpPr>
-          <p:cNvPr id="5" name="findingsbg"/>
-          <p:cNvSpPr/>
-          <p:nvPr/>
-        </p:nvSpPr>
-        <p:spPr>
-          <a:xfrm>
-            <a:off x="9124560" y="1371600"/>
-            <a:ext cx="2580480" cy="2950000"/>
+                <a:ea typeface="Georgia" pitchFamily="34" charset="-122"/>
+                <a:cs typeface="Georgia" pitchFamily="34" charset="-120"/>
+              </a:rPr>
+              <a:t>Where the model struggles and how to fix it</a:t>
+            </a:r>
+            <a:endParaRPr lang="en-US" sz="2600" dirty="0"/>
+          </a:p>
+        </p:txBody>
+      </p:sp>
+      <p:sp>
+        <p:nvSpPr>
+          <p:cNvPr id="4" name="Shape 2"/>
+          <p:cNvSpPr/>
+          <p:nvPr/>
+        </p:nvSpPr>
+        <p:spPr>
+          <a:xfrm>
+            <a:off x="457200" y="1463040"/>
+            <a:ext cx="5669280" cy="4754880"/>
           </a:xfrm>
           <a:prstGeom prst="rect">
             <a:avLst/>
@@ -2486,6 +2468,7 @@
             <a:solidFill>
               <a:srgbClr val="13243A"/>
             </a:solidFill>
+            <a:prstDash val="solid"/>
           </a:ln>
         </p:spPr>
         <p:txBody>
@@ -2498,14 +2481,429 @@
       </p:sp>
       <p:sp>
         <p:nvSpPr>
-          <p:cNvPr id="6" name="findingsside"/>
-          <p:cNvSpPr/>
-          <p:nvPr/>
-        </p:nvSpPr>
-        <p:spPr>
-          <a:xfrm>
-            <a:off x="9124560" y="1371600"/>
-            <a:ext cx="73152" cy="2950000"/>
+          <p:cNvPr id="5" name="Shape 3"/>
+          <p:cNvSpPr/>
+          <p:nvPr/>
+        </p:nvSpPr>
+        <p:spPr>
+          <a:xfrm>
+            <a:off x="457200" y="1463040"/>
+            <a:ext cx="73152" cy="4754880"/>
+          </a:xfrm>
+          <a:prstGeom prst="rect">
+            <a:avLst/>
+          </a:prstGeom>
+          <a:solidFill>
+            <a:srgbClr val="F59E0B"/>
+          </a:solidFill>
+          <a:ln w="12700">
+            <a:solidFill>
+              <a:srgbClr val="F59E0B"/>
+            </a:solidFill>
+            <a:prstDash val="solid"/>
+          </a:ln>
+        </p:spPr>
+        <p:txBody>
+          <a:bodyPr/>
+          <a:lstStyle/>
+          <a:p>
+            <a:endParaRPr lang="en-US"/>
+          </a:p>
+        </p:txBody>
+      </p:sp>
+      <p:sp>
+        <p:nvSpPr>
+          <p:cNvPr id="6" name="Text 4"/>
+          <p:cNvSpPr/>
+          <p:nvPr/>
+        </p:nvSpPr>
+        <p:spPr>
+          <a:xfrm>
+            <a:off x="685800" y="1600200"/>
+            <a:ext cx="5303520" cy="274320"/>
+          </a:xfrm>
+          <a:prstGeom prst="rect">
+            <a:avLst/>
+          </a:prstGeom>
+          <a:noFill/>
+          <a:ln/>
+        </p:spPr>
+        <p:txBody>
+          <a:bodyPr wrap="square" lIns="0" tIns="0" rIns="0" bIns="0" rtlCol="0" anchor="ctr"/>
+          <a:lstStyle/>
+          <a:p>
+            <a:pPr marL="0" indent="0">
+              <a:buNone/>
+            </a:pPr>
+            <a:r>
+              <a:rPr lang="en-US" sz="1100" b="1" kern="0" spc="300" dirty="0">
+                <a:solidFill>
+                  <a:srgbClr val="F59E0B"/>
+                </a:solidFill>
+                <a:latin typeface="Calibri" pitchFamily="34" charset="0"/>
+                <a:ea typeface="Calibri" pitchFamily="34" charset="-122"/>
+                <a:cs typeface="Calibri" pitchFamily="34" charset="-120"/>
+              </a:rPr>
+              <a:t>CURRENT CONSTRAINTS</a:t>
+            </a:r>
+            <a:endParaRPr lang="en-US" sz="1100" dirty="0"/>
+          </a:p>
+        </p:txBody>
+      </p:sp>
+      <p:sp>
+        <p:nvSpPr>
+          <p:cNvPr id="7" name="Text 5"/>
+          <p:cNvSpPr/>
+          <p:nvPr/>
+        </p:nvSpPr>
+        <p:spPr>
+          <a:xfrm>
+            <a:off x="777240" y="1920240"/>
+            <a:ext cx="5212080" cy="274320"/>
+          </a:xfrm>
+          <a:prstGeom prst="rect">
+            <a:avLst/>
+          </a:prstGeom>
+          <a:noFill/>
+          <a:ln/>
+        </p:spPr>
+        <p:txBody>
+          <a:bodyPr wrap="square" lIns="0" tIns="0" rIns="0" bIns="0" rtlCol="0" anchor="ctr"/>
+          <a:lstStyle/>
+          <a:p>
+            <a:pPr marL="0" indent="0">
+              <a:buNone/>
+            </a:pPr>
+            <a:r>
+              <a:rPr lang="en-US" sz="1300" b="1" dirty="0">
+                <a:solidFill>
+                  <a:srgbClr val="E2E8F0"/>
+                </a:solidFill>
+                <a:latin typeface="Calibri" pitchFamily="34" charset="0"/>
+                <a:ea typeface="Calibri" pitchFamily="34" charset="-122"/>
+                <a:cs typeface="Calibri" pitchFamily="34" charset="-120"/>
+              </a:rPr>
+              <a:t>Resolution ceiling</a:t>
+            </a:r>
+            <a:endParaRPr lang="en-US" sz="1300" dirty="0"/>
+          </a:p>
+        </p:txBody>
+      </p:sp>
+      <p:sp>
+        <p:nvSpPr>
+          <p:cNvPr id="8" name="Text 6"/>
+          <p:cNvSpPr/>
+          <p:nvPr/>
+        </p:nvSpPr>
+        <p:spPr>
+          <a:xfrm>
+            <a:off x="777240" y="2194560"/>
+            <a:ext cx="5212080" cy="685800"/>
+          </a:xfrm>
+          <a:prstGeom prst="rect">
+            <a:avLst/>
+          </a:prstGeom>
+          <a:noFill/>
+          <a:ln/>
+        </p:spPr>
+        <p:txBody>
+          <a:bodyPr wrap="square" lIns="0" tIns="0" rIns="0" bIns="0" rtlCol="0" anchor="t"/>
+          <a:lstStyle/>
+          <a:p>
+            <a:pPr marL="0" indent="0">
+              <a:buNone/>
+            </a:pPr>
+            <a:r>
+              <a:rPr lang="en-US" sz="1100" dirty="0">
+                <a:solidFill>
+                  <a:srgbClr val="94A3B8"/>
+                </a:solidFill>
+                <a:latin typeface="Calibri" pitchFamily="34" charset="0"/>
+                <a:ea typeface="Calibri" pitchFamily="34" charset="-122"/>
+                <a:cs typeface="Calibri" pitchFamily="34" charset="-120"/>
+              </a:rPr>
+              <a:t>15m Landsat patches resized to 64×64 cannot resolve stack geometry or cooling-tower detail that distinguishes fossil-fuel types.</a:t>
+            </a:r>
+            <a:endParaRPr lang="en-US" sz="1100" dirty="0"/>
+          </a:p>
+        </p:txBody>
+      </p:sp>
+      <p:sp>
+        <p:nvSpPr>
+          <p:cNvPr id="9" name="Text 7"/>
+          <p:cNvSpPr/>
+          <p:nvPr/>
+        </p:nvSpPr>
+        <p:spPr>
+          <a:xfrm>
+            <a:off x="777240" y="2971800"/>
+            <a:ext cx="5212080" cy="274320"/>
+          </a:xfrm>
+          <a:prstGeom prst="rect">
+            <a:avLst/>
+          </a:prstGeom>
+          <a:noFill/>
+          <a:ln/>
+        </p:spPr>
+        <p:txBody>
+          <a:bodyPr wrap="square" lIns="0" tIns="0" rIns="0" bIns="0" rtlCol="0" anchor="ctr"/>
+          <a:lstStyle/>
+          <a:p>
+            <a:pPr marL="0" indent="0">
+              <a:buNone/>
+            </a:pPr>
+            <a:r>
+              <a:rPr lang="en-US" sz="1300" b="1" dirty="0">
+                <a:solidFill>
+                  <a:srgbClr val="E2E8F0"/>
+                </a:solidFill>
+                <a:latin typeface="Calibri" pitchFamily="34" charset="0"/>
+                <a:ea typeface="Calibri" pitchFamily="34" charset="-122"/>
+                <a:cs typeface="Calibri" pitchFamily="34" charset="-120"/>
+              </a:rPr>
+              <a:t>Spectral coverage</a:t>
+            </a:r>
+            <a:endParaRPr lang="en-US" sz="1300" dirty="0"/>
+          </a:p>
+        </p:txBody>
+      </p:sp>
+      <p:sp>
+        <p:nvSpPr>
+          <p:cNvPr id="10" name="Text 8"/>
+          <p:cNvSpPr/>
+          <p:nvPr/>
+        </p:nvSpPr>
+        <p:spPr>
+          <a:xfrm>
+            <a:off x="777240" y="3246120"/>
+            <a:ext cx="5212080" cy="685800"/>
+          </a:xfrm>
+          <a:prstGeom prst="rect">
+            <a:avLst/>
+          </a:prstGeom>
+          <a:noFill/>
+          <a:ln/>
+        </p:spPr>
+        <p:txBody>
+          <a:bodyPr wrap="square" lIns="0" tIns="0" rIns="0" bIns="0" rtlCol="0" anchor="t"/>
+          <a:lstStyle/>
+          <a:p>
+            <a:pPr marL="0" indent="0">
+              <a:buNone/>
+            </a:pPr>
+            <a:r>
+              <a:rPr lang="en-US" sz="1100" dirty="0">
+                <a:solidFill>
+                  <a:srgbClr val="94A3B8"/>
+                </a:solidFill>
+                <a:latin typeface="Calibri" pitchFamily="34" charset="0"/>
+                <a:ea typeface="Calibri" pitchFamily="34" charset="-122"/>
+                <a:cs typeface="Calibri" pitchFamily="34" charset="-120"/>
+              </a:rPr>
+              <a:t>RGB-only input ignores thermal infrared (TIRS) bands that directly capture heat signatures from cooling systems and stacks.</a:t>
+            </a:r>
+            <a:endParaRPr lang="en-US" sz="1100" dirty="0"/>
+          </a:p>
+        </p:txBody>
+      </p:sp>
+      <p:sp>
+        <p:nvSpPr>
+          <p:cNvPr id="11" name="Text 9"/>
+          <p:cNvSpPr/>
+          <p:nvPr/>
+        </p:nvSpPr>
+        <p:spPr>
+          <a:xfrm>
+            <a:off x="777240" y="4023360"/>
+            <a:ext cx="5212080" cy="274320"/>
+          </a:xfrm>
+          <a:prstGeom prst="rect">
+            <a:avLst/>
+          </a:prstGeom>
+          <a:noFill/>
+          <a:ln/>
+        </p:spPr>
+        <p:txBody>
+          <a:bodyPr wrap="square" lIns="0" tIns="0" rIns="0" bIns="0" rtlCol="0" anchor="ctr"/>
+          <a:lstStyle/>
+          <a:p>
+            <a:pPr marL="0" indent="0">
+              <a:buNone/>
+            </a:pPr>
+            <a:r>
+              <a:rPr lang="en-US" sz="1300" b="1" dirty="0">
+                <a:solidFill>
+                  <a:srgbClr val="E2E8F0"/>
+                </a:solidFill>
+                <a:latin typeface="Calibri" pitchFamily="34" charset="0"/>
+                <a:ea typeface="Calibri" pitchFamily="34" charset="-122"/>
+                <a:cs typeface="Calibri" pitchFamily="34" charset="-120"/>
+              </a:rPr>
+              <a:t>Temporal snapshot</a:t>
+            </a:r>
+            <a:endParaRPr lang="en-US" sz="1300" dirty="0"/>
+          </a:p>
+        </p:txBody>
+      </p:sp>
+      <p:sp>
+        <p:nvSpPr>
+          <p:cNvPr id="12" name="Text 10"/>
+          <p:cNvSpPr/>
+          <p:nvPr/>
+        </p:nvSpPr>
+        <p:spPr>
+          <a:xfrm>
+            <a:off x="777240" y="4297680"/>
+            <a:ext cx="5212080" cy="685800"/>
+          </a:xfrm>
+          <a:prstGeom prst="rect">
+            <a:avLst/>
+          </a:prstGeom>
+          <a:noFill/>
+          <a:ln/>
+        </p:spPr>
+        <p:txBody>
+          <a:bodyPr wrap="square" lIns="0" tIns="0" rIns="0" bIns="0" rtlCol="0" anchor="t"/>
+          <a:lstStyle/>
+          <a:p>
+            <a:pPr marL="0" indent="0">
+              <a:buNone/>
+            </a:pPr>
+            <a:r>
+              <a:rPr lang="en-US" sz="1100" dirty="0">
+                <a:solidFill>
+                  <a:srgbClr val="94A3B8"/>
+                </a:solidFill>
+                <a:latin typeface="Calibri" pitchFamily="34" charset="0"/>
+                <a:ea typeface="Calibri" pitchFamily="34" charset="-122"/>
+                <a:cs typeface="Calibri" pitchFamily="34" charset="-120"/>
+              </a:rPr>
+              <a:t>Annual eGRID 2014 labels paired with single-image patches and no time alignment with hourly CEMS data or seasonal variation.</a:t>
+            </a:r>
+            <a:endParaRPr lang="en-US" sz="1100" dirty="0"/>
+          </a:p>
+        </p:txBody>
+      </p:sp>
+      <p:sp>
+        <p:nvSpPr>
+          <p:cNvPr id="13" name="Text 11"/>
+          <p:cNvSpPr/>
+          <p:nvPr/>
+        </p:nvSpPr>
+        <p:spPr>
+          <a:xfrm>
+            <a:off x="777240" y="5074920"/>
+            <a:ext cx="5212080" cy="274320"/>
+          </a:xfrm>
+          <a:prstGeom prst="rect">
+            <a:avLst/>
+          </a:prstGeom>
+          <a:noFill/>
+          <a:ln/>
+        </p:spPr>
+        <p:txBody>
+          <a:bodyPr wrap="square" lIns="0" tIns="0" rIns="0" bIns="0" rtlCol="0" anchor="ctr"/>
+          <a:lstStyle/>
+          <a:p>
+            <a:pPr marL="0" indent="0">
+              <a:buNone/>
+            </a:pPr>
+            <a:r>
+              <a:rPr lang="en-US" sz="1300" b="1" dirty="0">
+                <a:solidFill>
+                  <a:srgbClr val="E2E8F0"/>
+                </a:solidFill>
+                <a:latin typeface="Calibri" pitchFamily="34" charset="0"/>
+                <a:ea typeface="Calibri" pitchFamily="34" charset="-122"/>
+                <a:cs typeface="Calibri" pitchFamily="34" charset="-120"/>
+              </a:rPr>
+              <a:t>Geographic scope</a:t>
+            </a:r>
+            <a:endParaRPr lang="en-US" sz="1300" dirty="0"/>
+          </a:p>
+        </p:txBody>
+      </p:sp>
+      <p:sp>
+        <p:nvSpPr>
+          <p:cNvPr id="14" name="Text 12"/>
+          <p:cNvSpPr/>
+          <p:nvPr/>
+        </p:nvSpPr>
+        <p:spPr>
+          <a:xfrm>
+            <a:off x="777240" y="5349240"/>
+            <a:ext cx="5212080" cy="685800"/>
+          </a:xfrm>
+          <a:prstGeom prst="rect">
+            <a:avLst/>
+          </a:prstGeom>
+          <a:noFill/>
+          <a:ln/>
+        </p:spPr>
+        <p:txBody>
+          <a:bodyPr wrap="square" lIns="0" tIns="0" rIns="0" bIns="0" rtlCol="0" anchor="t"/>
+          <a:lstStyle/>
+          <a:p>
+            <a:pPr marL="0" indent="0">
+              <a:buNone/>
+            </a:pPr>
+            <a:r>
+              <a:rPr lang="en-US" sz="1100" dirty="0">
+                <a:solidFill>
+                  <a:srgbClr val="94A3B8"/>
+                </a:solidFill>
+                <a:latin typeface="Calibri" pitchFamily="34" charset="0"/>
+                <a:ea typeface="Calibri" pitchFamily="34" charset="-122"/>
+                <a:cs typeface="Calibri" pitchFamily="34" charset="-120"/>
+              </a:rPr>
+              <a:t>US-only training; generalization to international plants (where independent monitoring matters most) is untested.</a:t>
+            </a:r>
+            <a:endParaRPr lang="en-US" sz="1100" dirty="0"/>
+          </a:p>
+        </p:txBody>
+      </p:sp>
+      <p:sp>
+        <p:nvSpPr>
+          <p:cNvPr id="15" name="Shape 13"/>
+          <p:cNvSpPr/>
+          <p:nvPr/>
+        </p:nvSpPr>
+        <p:spPr>
+          <a:xfrm>
+            <a:off x="6492240" y="1463040"/>
+            <a:ext cx="5212080" cy="4754880"/>
+          </a:xfrm>
+          <a:prstGeom prst="rect">
+            <a:avLst/>
+          </a:prstGeom>
+          <a:solidFill>
+            <a:srgbClr val="13243A"/>
+          </a:solidFill>
+          <a:ln w="12700">
+            <a:solidFill>
+              <a:srgbClr val="13243A"/>
+            </a:solidFill>
+            <a:prstDash val="solid"/>
+          </a:ln>
+        </p:spPr>
+        <p:txBody>
+          <a:bodyPr/>
+          <a:lstStyle/>
+          <a:p>
+            <a:endParaRPr lang="en-US"/>
+          </a:p>
+        </p:txBody>
+      </p:sp>
+      <p:sp>
+        <p:nvSpPr>
+          <p:cNvPr id="16" name="Shape 14"/>
+          <p:cNvSpPr/>
+          <p:nvPr/>
+        </p:nvSpPr>
+        <p:spPr>
+          <a:xfrm>
+            <a:off x="6492240" y="1463040"/>
+            <a:ext cx="73152" cy="4754880"/>
           </a:xfrm>
           <a:prstGeom prst="rect">
             <a:avLst/>
@@ -2517,6 +2915,7 @@
             <a:solidFill>
               <a:srgbClr val="2DD4BF"/>
             </a:solidFill>
+            <a:prstDash val="solid"/>
           </a:ln>
         </p:spPr>
         <p:txBody>
@@ -2529,14 +2928,14 @@
       </p:sp>
       <p:sp>
         <p:nvSpPr>
-          <p:cNvPr id="7" name="findingslbl"/>
-          <p:cNvSpPr/>
-          <p:nvPr/>
-        </p:nvSpPr>
-        <p:spPr>
-          <a:xfrm>
-            <a:off x="9353160" y="1462560"/>
-            <a:ext cx="2251800" cy="274320"/>
+          <p:cNvPr id="17" name="Text 15"/>
+          <p:cNvSpPr/>
+          <p:nvPr/>
+        </p:nvSpPr>
+        <p:spPr>
+          <a:xfrm>
+            <a:off x="6720840" y="1600200"/>
+            <a:ext cx="4846320" cy="274320"/>
           </a:xfrm>
           <a:prstGeom prst="rect">
             <a:avLst/>
@@ -2557,22 +2956,103 @@
                   <a:srgbClr val="2DD4BF"/>
                 </a:solidFill>
                 <a:latin typeface="Calibri" pitchFamily="34" charset="0"/>
-              </a:rPr>
-              <a:t>KEY FINDINGS</a:t>
-            </a:r>
-          </a:p>
-        </p:txBody>
-      </p:sp>
-      <p:sp>
-        <p:nvSpPr>
-          <p:cNvPr id="8" name="findingstext"/>
-          <p:cNvSpPr/>
-          <p:nvPr/>
-        </p:nvSpPr>
-        <p:spPr>
-          <a:xfrm>
-            <a:off x="9353160" y="1828320"/>
-            <a:ext cx="2251800" cy="2194560"/>
+                <a:ea typeface="Calibri" pitchFamily="34" charset="-122"/>
+                <a:cs typeface="Calibri" pitchFamily="34" charset="-120"/>
+              </a:rPr>
+              <a:t>RECOMMENDED NEXT STEPS</a:t>
+            </a:r>
+            <a:endParaRPr lang="en-US" sz="1100" dirty="0"/>
+          </a:p>
+        </p:txBody>
+      </p:sp>
+      <p:sp>
+        <p:nvSpPr>
+          <p:cNvPr id="18" name="Text 16"/>
+          <p:cNvSpPr/>
+          <p:nvPr/>
+        </p:nvSpPr>
+        <p:spPr>
+          <a:xfrm>
+            <a:off x="6812280" y="1920240"/>
+            <a:ext cx="548640" cy="365760"/>
+          </a:xfrm>
+          <a:prstGeom prst="rect">
+            <a:avLst/>
+          </a:prstGeom>
+          <a:noFill/>
+          <a:ln/>
+        </p:spPr>
+        <p:txBody>
+          <a:bodyPr wrap="square" lIns="0" tIns="0" rIns="0" bIns="0" rtlCol="0" anchor="ctr"/>
+          <a:lstStyle/>
+          <a:p>
+            <a:pPr marL="0" indent="0">
+              <a:buNone/>
+            </a:pPr>
+            <a:r>
+              <a:rPr lang="en-US" sz="1600" b="1" dirty="0">
+                <a:solidFill>
+                  <a:srgbClr val="2DD4BF"/>
+                </a:solidFill>
+                <a:latin typeface="Georgia" pitchFamily="34" charset="0"/>
+                <a:ea typeface="Georgia" pitchFamily="34" charset="-122"/>
+                <a:cs typeface="Georgia" pitchFamily="34" charset="-120"/>
+              </a:rPr>
+              <a:t>01</a:t>
+            </a:r>
+            <a:endParaRPr lang="en-US" sz="1600" dirty="0"/>
+          </a:p>
+        </p:txBody>
+      </p:sp>
+      <p:sp>
+        <p:nvSpPr>
+          <p:cNvPr id="19" name="Text 17"/>
+          <p:cNvSpPr/>
+          <p:nvPr/>
+        </p:nvSpPr>
+        <p:spPr>
+          <a:xfrm>
+            <a:off x="7406640" y="1920240"/>
+            <a:ext cx="4206240" cy="274320"/>
+          </a:xfrm>
+          <a:prstGeom prst="rect">
+            <a:avLst/>
+          </a:prstGeom>
+          <a:noFill/>
+          <a:ln/>
+        </p:spPr>
+        <p:txBody>
+          <a:bodyPr wrap="square" lIns="0" tIns="0" rIns="0" bIns="0" rtlCol="0" anchor="ctr"/>
+          <a:lstStyle/>
+          <a:p>
+            <a:pPr marL="0" indent="0">
+              <a:buNone/>
+            </a:pPr>
+            <a:r>
+              <a:rPr lang="en-US" sz="1300" b="1" dirty="0">
+                <a:solidFill>
+                  <a:srgbClr val="E2E8F0"/>
+                </a:solidFill>
+                <a:latin typeface="Calibri" pitchFamily="34" charset="0"/>
+                <a:ea typeface="Calibri" pitchFamily="34" charset="-122"/>
+                <a:cs typeface="Calibri" pitchFamily="34" charset="-120"/>
+              </a:rPr>
+              <a:t>Upgrade imagery</a:t>
+            </a:r>
+            <a:endParaRPr lang="en-US" sz="1300" dirty="0"/>
+          </a:p>
+        </p:txBody>
+      </p:sp>
+      <p:sp>
+        <p:nvSpPr>
+          <p:cNvPr id="20" name="Text 18"/>
+          <p:cNvSpPr/>
+          <p:nvPr/>
+        </p:nvSpPr>
+        <p:spPr>
+          <a:xfrm>
+            <a:off x="7406640" y="2194560"/>
+            <a:ext cx="4206240" cy="685800"/>
           </a:xfrm>
           <a:prstGeom prst="rect">
             <a:avLst/>
@@ -2584,203 +3064,346 @@
           <a:bodyPr wrap="square" lIns="0" tIns="0" rIns="0" bIns="0" rtlCol="0" anchor="t"/>
           <a:lstStyle/>
           <a:p>
-            <a:pPr marL="342900" indent="-342900">
-              <a:spcAft>
-                <a:spcPts val="400"/>
-              </a:spcAft>
-              <a:buSzPct val="100000"/>
-              <a:buChar char="▸"/>
+            <a:pPr marL="0" indent="0">
+              <a:buNone/>
             </a:pPr>
             <a:r>
               <a:rPr lang="en-US" sz="1100" dirty="0">
                 <a:solidFill>
+                  <a:srgbClr val="94A3B8"/>
+                </a:solidFill>
+                <a:latin typeface="Calibri" pitchFamily="34" charset="0"/>
+                <a:ea typeface="Calibri" pitchFamily="34" charset="-122"/>
+                <a:cs typeface="Calibri" pitchFamily="34" charset="-120"/>
+              </a:rPr>
+              <a:t>Add NAIP 1m/px for detail and Landsat TIRS thermal bands for heat signatures so it directly targets fossil-fuel confusion.</a:t>
+            </a:r>
+            <a:endParaRPr lang="en-US" sz="1100" dirty="0"/>
+          </a:p>
+        </p:txBody>
+      </p:sp>
+      <p:sp>
+        <p:nvSpPr>
+          <p:cNvPr id="21" name="Text 19"/>
+          <p:cNvSpPr/>
+          <p:nvPr/>
+        </p:nvSpPr>
+        <p:spPr>
+          <a:xfrm>
+            <a:off x="6812280" y="2971800"/>
+            <a:ext cx="548640" cy="365760"/>
+          </a:xfrm>
+          <a:prstGeom prst="rect">
+            <a:avLst/>
+          </a:prstGeom>
+          <a:noFill/>
+          <a:ln/>
+        </p:spPr>
+        <p:txBody>
+          <a:bodyPr wrap="square" lIns="0" tIns="0" rIns="0" bIns="0" rtlCol="0" anchor="ctr"/>
+          <a:lstStyle/>
+          <a:p>
+            <a:pPr marL="0" indent="0">
+              <a:buNone/>
+            </a:pPr>
+            <a:r>
+              <a:rPr lang="en-US" sz="1600" b="1" dirty="0">
+                <a:solidFill>
+                  <a:srgbClr val="2DD4BF"/>
+                </a:solidFill>
+                <a:latin typeface="Georgia" pitchFamily="34" charset="0"/>
+                <a:ea typeface="Georgia" pitchFamily="34" charset="-122"/>
+                <a:cs typeface="Georgia" pitchFamily="34" charset="-120"/>
+              </a:rPr>
+              <a:t>02</a:t>
+            </a:r>
+            <a:endParaRPr lang="en-US" sz="1600" dirty="0"/>
+          </a:p>
+        </p:txBody>
+      </p:sp>
+      <p:sp>
+        <p:nvSpPr>
+          <p:cNvPr id="22" name="Text 20"/>
+          <p:cNvSpPr/>
+          <p:nvPr/>
+        </p:nvSpPr>
+        <p:spPr>
+          <a:xfrm>
+            <a:off x="7406640" y="2971800"/>
+            <a:ext cx="4206240" cy="274320"/>
+          </a:xfrm>
+          <a:prstGeom prst="rect">
+            <a:avLst/>
+          </a:prstGeom>
+          <a:noFill/>
+          <a:ln/>
+        </p:spPr>
+        <p:txBody>
+          <a:bodyPr wrap="square" lIns="0" tIns="0" rIns="0" bIns="0" rtlCol="0" anchor="ctr"/>
+          <a:lstStyle/>
+          <a:p>
+            <a:pPr marL="0" indent="0">
+              <a:buNone/>
+            </a:pPr>
+            <a:r>
+              <a:rPr lang="en-US" sz="1300" b="1" dirty="0">
+                <a:solidFill>
                   <a:srgbClr val="E2E8F0"/>
                 </a:solidFill>
                 <a:latin typeface="Calibri" pitchFamily="34" charset="0"/>
-              </a:rPr>
-              <a:t>NUCLEAR median score ~0.40 is the highest across all fuel classes.</a:t>
-            </a:r>
-          </a:p>
-          <a:p>
-            <a:pPr marL="0" indent="0">
-              <a:spcAft>
-                <a:spcPts val="200"/>
-              </a:spcAft>
-              <a:buNone/>
-            </a:pPr>
-            <a:r>
-              <a:rPr lang="en-US" sz="400" dirty="0">
-                <a:solidFill>
-                  <a:srgbClr val="000000"/>
-                </a:solidFill>
-                <a:latin typeface="Calibri"/>
-              </a:rPr>
-              <a:t> </a:t>
-            </a:r>
-          </a:p>
-          <a:p>
-            <a:pPr marL="342900" indent="-342900">
-              <a:spcAft>
-                <a:spcPts val="400"/>
-              </a:spcAft>
-              <a:buSzPct val="100000"/>
-              <a:buChar char="▸"/>
+                <a:ea typeface="Calibri" pitchFamily="34" charset="-122"/>
+                <a:cs typeface="Calibri" pitchFamily="34" charset="-120"/>
+              </a:rPr>
+              <a:t>Time-align labels</a:t>
+            </a:r>
+            <a:endParaRPr lang="en-US" sz="1300" dirty="0"/>
+          </a:p>
+        </p:txBody>
+      </p:sp>
+      <p:sp>
+        <p:nvSpPr>
+          <p:cNvPr id="23" name="Text 21"/>
+          <p:cNvSpPr/>
+          <p:nvPr/>
+        </p:nvSpPr>
+        <p:spPr>
+          <a:xfrm>
+            <a:off x="7406640" y="3246120"/>
+            <a:ext cx="4206240" cy="685800"/>
+          </a:xfrm>
+          <a:prstGeom prst="rect">
+            <a:avLst/>
+          </a:prstGeom>
+          <a:noFill/>
+          <a:ln/>
+        </p:spPr>
+        <p:txBody>
+          <a:bodyPr wrap="square" lIns="0" tIns="0" rIns="0" bIns="0" rtlCol="0" anchor="t"/>
+          <a:lstStyle/>
+          <a:p>
+            <a:pPr marL="0" indent="0">
+              <a:buNone/>
             </a:pPr>
             <a:r>
               <a:rPr lang="en-US" sz="1100" dirty="0">
                 <a:solidFill>
+                  <a:srgbClr val="94A3B8"/>
+                </a:solidFill>
+                <a:latin typeface="Calibri" pitchFamily="34" charset="0"/>
+                <a:ea typeface="Calibri" pitchFamily="34" charset="-122"/>
+                <a:cs typeface="Calibri" pitchFamily="34" charset="-120"/>
+              </a:rPr>
+              <a:t>Use EPA CAMPD hourly CEMS data matched to image acquisition dates (turns the regression into a true continuous signal).</a:t>
+            </a:r>
+            <a:endParaRPr lang="en-US" sz="1100" dirty="0"/>
+          </a:p>
+        </p:txBody>
+      </p:sp>
+      <p:sp>
+        <p:nvSpPr>
+          <p:cNvPr id="24" name="Text 22"/>
+          <p:cNvSpPr/>
+          <p:nvPr/>
+        </p:nvSpPr>
+        <p:spPr>
+          <a:xfrm>
+            <a:off x="6812280" y="4023360"/>
+            <a:ext cx="548640" cy="365760"/>
+          </a:xfrm>
+          <a:prstGeom prst="rect">
+            <a:avLst/>
+          </a:prstGeom>
+          <a:noFill/>
+          <a:ln/>
+        </p:spPr>
+        <p:txBody>
+          <a:bodyPr wrap="square" lIns="0" tIns="0" rIns="0" bIns="0" rtlCol="0" anchor="ctr"/>
+          <a:lstStyle/>
+          <a:p>
+            <a:pPr marL="0" indent="0">
+              <a:buNone/>
+            </a:pPr>
+            <a:r>
+              <a:rPr lang="en-US" sz="1600" b="1" dirty="0">
+                <a:solidFill>
+                  <a:srgbClr val="2DD4BF"/>
+                </a:solidFill>
+                <a:latin typeface="Georgia" pitchFamily="34" charset="0"/>
+                <a:ea typeface="Georgia" pitchFamily="34" charset="-122"/>
+                <a:cs typeface="Georgia" pitchFamily="34" charset="-120"/>
+              </a:rPr>
+              <a:t>03</a:t>
+            </a:r>
+            <a:endParaRPr lang="en-US" sz="1600" dirty="0"/>
+          </a:p>
+        </p:txBody>
+      </p:sp>
+      <p:sp>
+        <p:nvSpPr>
+          <p:cNvPr id="25" name="Text 23"/>
+          <p:cNvSpPr/>
+          <p:nvPr/>
+        </p:nvSpPr>
+        <p:spPr>
+          <a:xfrm>
+            <a:off x="7406640" y="4023360"/>
+            <a:ext cx="4206240" cy="274320"/>
+          </a:xfrm>
+          <a:prstGeom prst="rect">
+            <a:avLst/>
+          </a:prstGeom>
+          <a:noFill/>
+          <a:ln/>
+        </p:spPr>
+        <p:txBody>
+          <a:bodyPr wrap="square" lIns="0" tIns="0" rIns="0" bIns="0" rtlCol="0" anchor="ctr"/>
+          <a:lstStyle/>
+          <a:p>
+            <a:pPr marL="0" indent="0">
+              <a:buNone/>
+            </a:pPr>
+            <a:r>
+              <a:rPr lang="en-US" sz="1300" b="1" dirty="0">
+                <a:solidFill>
                   <a:srgbClr val="E2E8F0"/>
                 </a:solidFill>
                 <a:latin typeface="Calibri" pitchFamily="34" charset="0"/>
-              </a:rPr>
-              <a:t>CA leads with 5 flagged plants; MN follows with 4.</a:t>
-            </a:r>
-          </a:p>
-          <a:p>
-            <a:pPr marL="0" indent="0">
-              <a:spcAft>
-                <a:spcPts val="200"/>
-              </a:spcAft>
-              <a:buNone/>
-            </a:pPr>
-            <a:r>
-              <a:rPr lang="en-US" sz="400" dirty="0">
-                <a:solidFill>
-                  <a:srgbClr val="000000"/>
-                </a:solidFill>
-                <a:latin typeface="Calibri"/>
-              </a:rPr>
-              <a:t> </a:t>
-            </a:r>
-          </a:p>
-          <a:p>
-            <a:pPr marL="342900" indent="-342900">
-              <a:spcAft>
-                <a:spcPts val="400"/>
-              </a:spcAft>
-              <a:buSzPct val="100000"/>
-              <a:buChar char="▸"/>
+                <a:ea typeface="Calibri" pitchFamily="34" charset="-122"/>
+                <a:cs typeface="Calibri" pitchFamily="34" charset="-120"/>
+              </a:rPr>
+              <a:t>Pilot anomaly watchlist</a:t>
+            </a:r>
+            <a:endParaRPr lang="en-US" sz="1300" dirty="0"/>
+          </a:p>
+        </p:txBody>
+      </p:sp>
+      <p:sp>
+        <p:nvSpPr>
+          <p:cNvPr id="26" name="Text 24"/>
+          <p:cNvSpPr/>
+          <p:nvPr/>
+        </p:nvSpPr>
+        <p:spPr>
+          <a:xfrm>
+            <a:off x="7406640" y="4297680"/>
+            <a:ext cx="4206240" cy="685800"/>
+          </a:xfrm>
+          <a:prstGeom prst="rect">
+            <a:avLst/>
+          </a:prstGeom>
+          <a:noFill/>
+          <a:ln/>
+        </p:spPr>
+        <p:txBody>
+          <a:bodyPr wrap="square" lIns="0" tIns="0" rIns="0" bIns="0" rtlCol="0" anchor="t"/>
+          <a:lstStyle/>
+          <a:p>
+            <a:pPr marL="0" indent="0">
+              <a:buNone/>
             </a:pPr>
             <a:r>
               <a:rPr lang="en-US" sz="1100" dirty="0">
                 <a:solidFill>
+                  <a:srgbClr val="94A3B8"/>
+                </a:solidFill>
+                <a:latin typeface="Calibri" pitchFamily="34" charset="0"/>
+                <a:ea typeface="Calibri" pitchFamily="34" charset="-122"/>
+                <a:cs typeface="Calibri" pitchFamily="34" charset="-120"/>
+              </a:rPr>
+              <a:t>Run Task 4 ensemble on flagged plants with a regulatory partner; measure precision of follow-up investigations.</a:t>
+            </a:r>
+            <a:endParaRPr lang="en-US" sz="1100" dirty="0"/>
+          </a:p>
+        </p:txBody>
+      </p:sp>
+      <p:sp>
+        <p:nvSpPr>
+          <p:cNvPr id="27" name="Text 25"/>
+          <p:cNvSpPr/>
+          <p:nvPr/>
+        </p:nvSpPr>
+        <p:spPr>
+          <a:xfrm>
+            <a:off x="6812280" y="5074920"/>
+            <a:ext cx="548640" cy="365760"/>
+          </a:xfrm>
+          <a:prstGeom prst="rect">
+            <a:avLst/>
+          </a:prstGeom>
+          <a:noFill/>
+          <a:ln/>
+        </p:spPr>
+        <p:txBody>
+          <a:bodyPr wrap="square" lIns="0" tIns="0" rIns="0" bIns="0" rtlCol="0" anchor="ctr"/>
+          <a:lstStyle/>
+          <a:p>
+            <a:pPr marL="0" indent="0">
+              <a:buNone/>
+            </a:pPr>
+            <a:r>
+              <a:rPr lang="en-US" sz="1600" b="1" dirty="0">
+                <a:solidFill>
+                  <a:srgbClr val="2DD4BF"/>
+                </a:solidFill>
+                <a:latin typeface="Georgia" pitchFamily="34" charset="0"/>
+                <a:ea typeface="Georgia" pitchFamily="34" charset="-122"/>
+                <a:cs typeface="Georgia" pitchFamily="34" charset="-120"/>
+              </a:rPr>
+              <a:t>04</a:t>
+            </a:r>
+            <a:endParaRPr lang="en-US" sz="1600" dirty="0"/>
+          </a:p>
+        </p:txBody>
+      </p:sp>
+      <p:sp>
+        <p:nvSpPr>
+          <p:cNvPr id="28" name="Text 26"/>
+          <p:cNvSpPr/>
+          <p:nvPr/>
+        </p:nvSpPr>
+        <p:spPr>
+          <a:xfrm>
+            <a:off x="7406640" y="5074920"/>
+            <a:ext cx="4206240" cy="274320"/>
+          </a:xfrm>
+          <a:prstGeom prst="rect">
+            <a:avLst/>
+          </a:prstGeom>
+          <a:noFill/>
+          <a:ln/>
+        </p:spPr>
+        <p:txBody>
+          <a:bodyPr wrap="square" lIns="0" tIns="0" rIns="0" bIns="0" rtlCol="0" anchor="ctr"/>
+          <a:lstStyle/>
+          <a:p>
+            <a:pPr marL="0" indent="0">
+              <a:buNone/>
+            </a:pPr>
+            <a:r>
+              <a:rPr lang="en-US" sz="1300" b="1" dirty="0">
+                <a:solidFill>
                   <a:srgbClr val="E2E8F0"/>
                 </a:solidFill>
                 <a:latin typeface="Calibri" pitchFamily="34" charset="0"/>
-              </a:rPr>
-              <a:t>HYDRO scores lowest — consistent with its zero-emissions profile and clean visual signal.</a:t>
-            </a:r>
-          </a:p>
-        </p:txBody>
-      </p:sp>
-      <p:sp>
-        <p:nvSpPr>
-          <p:cNvPr id="9" name="weightsbg"/>
-          <p:cNvSpPr/>
-          <p:nvPr/>
-        </p:nvSpPr>
-        <p:spPr>
-          <a:xfrm>
-            <a:off x="457200" y="4503960"/>
-            <a:ext cx="11247120" cy="1645680"/>
-          </a:xfrm>
-          <a:prstGeom prst="rect">
-            <a:avLst/>
-          </a:prstGeom>
-          <a:solidFill>
-            <a:srgbClr val="13243A"/>
-          </a:solidFill>
-          <a:ln w="12700">
-            <a:solidFill>
-              <a:srgbClr val="13243A"/>
-            </a:solidFill>
-          </a:ln>
-        </p:spPr>
-        <p:txBody>
-          <a:bodyPr/>
-          <a:lstStyle/>
-          <a:p>
-            <a:endParaRPr lang="en-US"/>
-          </a:p>
-        </p:txBody>
-      </p:sp>
-      <p:sp>
-        <p:nvSpPr>
-          <p:cNvPr id="10" name="weightsside"/>
-          <p:cNvSpPr/>
-          <p:nvPr/>
-        </p:nvSpPr>
-        <p:spPr>
-          <a:xfrm>
-            <a:off x="457200" y="4503960"/>
-            <a:ext cx="73152" cy="1645680"/>
-          </a:xfrm>
-          <a:prstGeom prst="rect">
-            <a:avLst/>
-          </a:prstGeom>
-          <a:solidFill>
-            <a:srgbClr val="F59E0B"/>
-          </a:solidFill>
-          <a:ln w="12700">
-            <a:solidFill>
-              <a:srgbClr val="F59E0B"/>
-            </a:solidFill>
-          </a:ln>
-        </p:spPr>
-        <p:txBody>
-          <a:bodyPr/>
-          <a:lstStyle/>
-          <a:p>
-            <a:endParaRPr lang="en-US"/>
-          </a:p>
-        </p:txBody>
-      </p:sp>
-      <p:sp>
-        <p:nvSpPr>
-          <p:cNvPr id="11" name="weightslbl"/>
-          <p:cNvSpPr/>
-          <p:nvPr/>
-        </p:nvSpPr>
-        <p:spPr>
-          <a:xfrm>
-            <a:off x="685800" y="4595400"/>
-            <a:ext cx="11018520" cy="274320"/>
-          </a:xfrm>
-          <a:prstGeom prst="rect">
-            <a:avLst/>
-          </a:prstGeom>
-          <a:noFill/>
-          <a:ln/>
-        </p:spPr>
-        <p:txBody>
-          <a:bodyPr wrap="square" lIns="0" tIns="0" rIns="0" bIns="0" rtlCol="0" anchor="ctr"/>
-          <a:lstStyle/>
-          <a:p>
-            <a:pPr marL="0" indent="0">
-              <a:buNone/>
-            </a:pPr>
-            <a:r>
-              <a:rPr lang="en-US" sz="1100" b="1" kern="0" spc="300" dirty="0">
-                <a:solidFill>
-                  <a:srgbClr val="F59E0B"/>
-                </a:solidFill>
-                <a:latin typeface="Calibri" pitchFamily="34" charset="0"/>
-              </a:rPr>
-              <a:t>ENSEMBLE WEIGHTS  ·  Residual Z-score 40%  ·  Isolation Forest 25%  ·  One-Class SVM 20%  ·  MC Dropout Uncertainty 15%</a:t>
-            </a:r>
-          </a:p>
-        </p:txBody>
-      </p:sp>
-      <p:sp>
-        <p:nvSpPr>
-          <p:cNvPr id="12" name="weightstext"/>
-          <p:cNvSpPr/>
-          <p:nvPr/>
-        </p:nvSpPr>
-        <p:spPr>
-          <a:xfrm>
-            <a:off x="685800" y="4961160"/>
-            <a:ext cx="11018520" cy="914400"/>
+                <a:ea typeface="Calibri" pitchFamily="34" charset="-122"/>
+                <a:cs typeface="Calibri" pitchFamily="34" charset="-120"/>
+              </a:rPr>
+              <a:t>Generalize globally</a:t>
+            </a:r>
+            <a:endParaRPr lang="en-US" sz="1300" dirty="0"/>
+          </a:p>
+        </p:txBody>
+      </p:sp>
+      <p:sp>
+        <p:nvSpPr>
+          <p:cNvPr id="29" name="Text 27"/>
+          <p:cNvSpPr/>
+          <p:nvPr/>
+        </p:nvSpPr>
+        <p:spPr>
+          <a:xfrm>
+            <a:off x="7406640" y="5349240"/>
+            <a:ext cx="4206240" cy="685800"/>
           </a:xfrm>
           <a:prstGeom prst="rect">
             <a:avLst/>
@@ -2796,38 +3419,23 @@
               <a:buNone/>
             </a:pPr>
             <a:r>
-              <a:rPr lang="en-US" sz="1200" dirty="0">
-                <a:solidFill>
-                  <a:srgbClr val="E2E8F0"/>
-                </a:solidFill>
-                <a:latin typeface="Calibri" pitchFamily="34" charset="0"/>
-              </a:rPr>
-              <a:t>Convergent evidence from all four signals is required before a facility appears on the watchlist — no single detector can flag a plant alone. The full ranked watchlist (4,435 plants) is available in </a:t>
-            </a:r>
-            <a:r>
-              <a:rPr lang="en-US" sz="1200" b="1" dirty="0">
-                <a:solidFill>
-                  <a:srgbClr val="2DD4BF"/>
-                </a:solidFill>
-                <a:latin typeface="Calibri" pitchFamily="34" charset="0"/>
-              </a:rPr>
-              <a:t>anomaly_watchlist.csv</a:t>
-            </a:r>
-            <a:r>
-              <a:rPr lang="en-US" sz="1200" dirty="0">
-                <a:solidFill>
-                  <a:srgbClr val="E2E8F0"/>
-                </a:solidFill>
-                <a:latin typeface="Calibri" pitchFamily="34" charset="0"/>
-              </a:rPr>
-              <a:t> for regulatory partner review.</a:t>
-            </a:r>
-          </a:p>
-        </p:txBody>
-      </p:sp>
-      <p:sp>
-        <p:nvSpPr>
-          <p:cNvPr id="13" name="footer"/>
+              <a:rPr lang="en-US" sz="1100" dirty="0">
+                <a:solidFill>
+                  <a:srgbClr val="94A3B8"/>
+                </a:solidFill>
+                <a:latin typeface="Calibri" pitchFamily="34" charset="0"/>
+                <a:ea typeface="Calibri" pitchFamily="34" charset="-122"/>
+                <a:cs typeface="Calibri" pitchFamily="34" charset="-120"/>
+              </a:rPr>
+              <a:t>Extend to WRI Global Power Plant Database and test whether the model holds in jurisdictions with weaker reporting.</a:t>
+            </a:r>
+            <a:endParaRPr lang="en-US" sz="1100" dirty="0"/>
+          </a:p>
+        </p:txBody>
+      </p:sp>
+      <p:sp>
+        <p:nvSpPr>
+          <p:cNvPr id="30" name="Text 28"/>
           <p:cNvSpPr/>
           <p:nvPr/>
         </p:nvSpPr>
@@ -2855,15 +3463,18 @@
                   <a:srgbClr val="64748B"/>
                 </a:solidFill>
                 <a:latin typeface="Calibri" pitchFamily="34" charset="0"/>
+                <a:ea typeface="Calibri" pitchFamily="34" charset="-122"/>
+                <a:cs typeface="Calibri" pitchFamily="34" charset="-120"/>
               </a:rPr>
               <a:t>Emissions from Above  ·  Scott · Sen · Ronquillo · Rodriguez</a:t>
             </a:r>
-          </a:p>
-        </p:txBody>
-      </p:sp>
-      <p:sp>
-        <p:nvSpPr>
-          <p:cNvPr id="14" name="pagenum"/>
+            <a:endParaRPr lang="en-US" sz="900" dirty="0"/>
+          </a:p>
+        </p:txBody>
+      </p:sp>
+      <p:sp>
+        <p:nvSpPr>
+          <p:cNvPr id="31" name="Text 29"/>
           <p:cNvSpPr/>
           <p:nvPr/>
         </p:nvSpPr>
@@ -2891,9 +3502,12 @@
                   <a:srgbClr val="64748B"/>
                 </a:solidFill>
                 <a:latin typeface="Calibri" pitchFamily="34" charset="0"/>
-              </a:rPr>
-              <a:t>12 / 12</a:t>
-            </a:r>
+                <a:ea typeface="Calibri" pitchFamily="34" charset="-122"/>
+                <a:cs typeface="Calibri" pitchFamily="34" charset="-120"/>
+              </a:rPr>
+              <a:t>7 / 12</a:t>
+            </a:r>
+            <a:endParaRPr lang="en-US" sz="900" dirty="0"/>
           </a:p>
         </p:txBody>
       </p:sp>
@@ -2963,7 +3577,7 @@
                 <a:ea typeface="Calibri" pitchFamily="34" charset="-122"/>
                 <a:cs typeface="Calibri" pitchFamily="34" charset="-120"/>
               </a:rPr>
-              <a:t>07  ·  BUSINESS IMPACT</a:t>
+              <a:t>10  ·  BUSINESS IMPACT</a:t>
             </a:r>
             <a:endParaRPr lang="en-US" sz="1000" dirty="0"/>
           </a:p>
@@ -9828,1181 +10442,6 @@
 
 <file path=ppt/slides/slide7.xml><?xml version="1.0" encoding="utf-8"?>
 <p:sld xmlns:a="http://schemas.openxmlformats.org/drawingml/2006/main" xmlns:r="http://schemas.openxmlformats.org/officeDocument/2006/relationships" xmlns:p="http://schemas.openxmlformats.org/presentationml/2006/main">
-  <p:cSld name="Slide 7">
-    <p:bg>
-      <p:bgPr>
-        <a:solidFill>
-          <a:srgbClr val="0B1929"/>
-        </a:solidFill>
-        <a:effectLst/>
-      </p:bgPr>
-    </p:bg>
-    <p:spTree>
-      <p:nvGrpSpPr>
-        <p:cNvPr id="1" name=""/>
-        <p:cNvGrpSpPr/>
-        <p:nvPr/>
-      </p:nvGrpSpPr>
-      <p:grpSpPr>
-        <a:xfrm>
-          <a:off x="0" y="0"/>
-          <a:ext cx="0" cy="0"/>
-          <a:chOff x="0" y="0"/>
-          <a:chExt cx="0" cy="0"/>
-        </a:xfrm>
-      </p:grpSpPr>
-      <p:sp>
-        <p:nvSpPr>
-          <p:cNvPr id="2" name="Text 0"/>
-          <p:cNvSpPr/>
-          <p:nvPr/>
-        </p:nvSpPr>
-        <p:spPr>
-          <a:xfrm>
-            <a:off x="457200" y="274320"/>
-            <a:ext cx="11247120" cy="274320"/>
-          </a:xfrm>
-          <a:prstGeom prst="rect">
-            <a:avLst/>
-          </a:prstGeom>
-          <a:noFill/>
-          <a:ln/>
-        </p:spPr>
-        <p:txBody>
-          <a:bodyPr wrap="square" lIns="0" tIns="0" rIns="0" bIns="0" rtlCol="0" anchor="ctr"/>
-          <a:lstStyle/>
-          <a:p>
-            <a:pPr marL="0" indent="0">
-              <a:buNone/>
-            </a:pPr>
-            <a:r>
-              <a:rPr lang="en-US" sz="1000" b="1" kern="0" spc="400" dirty="0">
-                <a:solidFill>
-                  <a:srgbClr val="2DD4BF"/>
-                </a:solidFill>
-                <a:latin typeface="Calibri" pitchFamily="34" charset="0"/>
-                <a:ea typeface="Calibri" pitchFamily="34" charset="-122"/>
-                <a:cs typeface="Calibri" pitchFamily="34" charset="-120"/>
-              </a:rPr>
-              <a:t>06  ·  LIMITATIONS</a:t>
-            </a:r>
-            <a:endParaRPr lang="en-US" sz="1000" dirty="0"/>
-          </a:p>
-        </p:txBody>
-      </p:sp>
-      <p:sp>
-        <p:nvSpPr>
-          <p:cNvPr id="3" name="Text 1"/>
-          <p:cNvSpPr/>
-          <p:nvPr/>
-        </p:nvSpPr>
-        <p:spPr>
-          <a:xfrm>
-            <a:off x="457200" y="548640"/>
-            <a:ext cx="11247120" cy="777240"/>
-          </a:xfrm>
-          <a:prstGeom prst="rect">
-            <a:avLst/>
-          </a:prstGeom>
-          <a:noFill/>
-          <a:ln/>
-        </p:spPr>
-        <p:txBody>
-          <a:bodyPr wrap="square" lIns="0" tIns="0" rIns="0" bIns="0" rtlCol="0" anchor="t"/>
-          <a:lstStyle/>
-          <a:p>
-            <a:pPr marL="0" indent="0">
-              <a:buNone/>
-            </a:pPr>
-            <a:r>
-              <a:rPr lang="en-US" sz="2600" b="1" dirty="0">
-                <a:solidFill>
-                  <a:srgbClr val="E2E8F0"/>
-                </a:solidFill>
-                <a:latin typeface="Georgia" pitchFamily="34" charset="0"/>
-                <a:ea typeface="Georgia" pitchFamily="34" charset="-122"/>
-                <a:cs typeface="Georgia" pitchFamily="34" charset="-120"/>
-              </a:rPr>
-              <a:t>Where the model struggles and how to fix it</a:t>
-            </a:r>
-            <a:endParaRPr lang="en-US" sz="2600" dirty="0"/>
-          </a:p>
-        </p:txBody>
-      </p:sp>
-      <p:sp>
-        <p:nvSpPr>
-          <p:cNvPr id="4" name="Shape 2"/>
-          <p:cNvSpPr/>
-          <p:nvPr/>
-        </p:nvSpPr>
-        <p:spPr>
-          <a:xfrm>
-            <a:off x="457200" y="1463040"/>
-            <a:ext cx="5669280" cy="4754880"/>
-          </a:xfrm>
-          <a:prstGeom prst="rect">
-            <a:avLst/>
-          </a:prstGeom>
-          <a:solidFill>
-            <a:srgbClr val="13243A"/>
-          </a:solidFill>
-          <a:ln w="12700">
-            <a:solidFill>
-              <a:srgbClr val="13243A"/>
-            </a:solidFill>
-            <a:prstDash val="solid"/>
-          </a:ln>
-        </p:spPr>
-        <p:txBody>
-          <a:bodyPr/>
-          <a:lstStyle/>
-          <a:p>
-            <a:endParaRPr lang="en-US"/>
-          </a:p>
-        </p:txBody>
-      </p:sp>
-      <p:sp>
-        <p:nvSpPr>
-          <p:cNvPr id="5" name="Shape 3"/>
-          <p:cNvSpPr/>
-          <p:nvPr/>
-        </p:nvSpPr>
-        <p:spPr>
-          <a:xfrm>
-            <a:off x="457200" y="1463040"/>
-            <a:ext cx="73152" cy="4754880"/>
-          </a:xfrm>
-          <a:prstGeom prst="rect">
-            <a:avLst/>
-          </a:prstGeom>
-          <a:solidFill>
-            <a:srgbClr val="F59E0B"/>
-          </a:solidFill>
-          <a:ln w="12700">
-            <a:solidFill>
-              <a:srgbClr val="F59E0B"/>
-            </a:solidFill>
-            <a:prstDash val="solid"/>
-          </a:ln>
-        </p:spPr>
-        <p:txBody>
-          <a:bodyPr/>
-          <a:lstStyle/>
-          <a:p>
-            <a:endParaRPr lang="en-US"/>
-          </a:p>
-        </p:txBody>
-      </p:sp>
-      <p:sp>
-        <p:nvSpPr>
-          <p:cNvPr id="6" name="Text 4"/>
-          <p:cNvSpPr/>
-          <p:nvPr/>
-        </p:nvSpPr>
-        <p:spPr>
-          <a:xfrm>
-            <a:off x="685800" y="1600200"/>
-            <a:ext cx="5303520" cy="274320"/>
-          </a:xfrm>
-          <a:prstGeom prst="rect">
-            <a:avLst/>
-          </a:prstGeom>
-          <a:noFill/>
-          <a:ln/>
-        </p:spPr>
-        <p:txBody>
-          <a:bodyPr wrap="square" lIns="0" tIns="0" rIns="0" bIns="0" rtlCol="0" anchor="ctr"/>
-          <a:lstStyle/>
-          <a:p>
-            <a:pPr marL="0" indent="0">
-              <a:buNone/>
-            </a:pPr>
-            <a:r>
-              <a:rPr lang="en-US" sz="1100" b="1" kern="0" spc="300" dirty="0">
-                <a:solidFill>
-                  <a:srgbClr val="F59E0B"/>
-                </a:solidFill>
-                <a:latin typeface="Calibri" pitchFamily="34" charset="0"/>
-                <a:ea typeface="Calibri" pitchFamily="34" charset="-122"/>
-                <a:cs typeface="Calibri" pitchFamily="34" charset="-120"/>
-              </a:rPr>
-              <a:t>CURRENT CONSTRAINTS</a:t>
-            </a:r>
-            <a:endParaRPr lang="en-US" sz="1100" dirty="0"/>
-          </a:p>
-        </p:txBody>
-      </p:sp>
-      <p:sp>
-        <p:nvSpPr>
-          <p:cNvPr id="7" name="Text 5"/>
-          <p:cNvSpPr/>
-          <p:nvPr/>
-        </p:nvSpPr>
-        <p:spPr>
-          <a:xfrm>
-            <a:off x="777240" y="1920240"/>
-            <a:ext cx="5212080" cy="274320"/>
-          </a:xfrm>
-          <a:prstGeom prst="rect">
-            <a:avLst/>
-          </a:prstGeom>
-          <a:noFill/>
-          <a:ln/>
-        </p:spPr>
-        <p:txBody>
-          <a:bodyPr wrap="square" lIns="0" tIns="0" rIns="0" bIns="0" rtlCol="0" anchor="ctr"/>
-          <a:lstStyle/>
-          <a:p>
-            <a:pPr marL="0" indent="0">
-              <a:buNone/>
-            </a:pPr>
-            <a:r>
-              <a:rPr lang="en-US" sz="1300" b="1" dirty="0">
-                <a:solidFill>
-                  <a:srgbClr val="E2E8F0"/>
-                </a:solidFill>
-                <a:latin typeface="Calibri" pitchFamily="34" charset="0"/>
-                <a:ea typeface="Calibri" pitchFamily="34" charset="-122"/>
-                <a:cs typeface="Calibri" pitchFamily="34" charset="-120"/>
-              </a:rPr>
-              <a:t>Resolution ceiling</a:t>
-            </a:r>
-            <a:endParaRPr lang="en-US" sz="1300" dirty="0"/>
-          </a:p>
-        </p:txBody>
-      </p:sp>
-      <p:sp>
-        <p:nvSpPr>
-          <p:cNvPr id="8" name="Text 6"/>
-          <p:cNvSpPr/>
-          <p:nvPr/>
-        </p:nvSpPr>
-        <p:spPr>
-          <a:xfrm>
-            <a:off x="777240" y="2194560"/>
-            <a:ext cx="5212080" cy="685800"/>
-          </a:xfrm>
-          <a:prstGeom prst="rect">
-            <a:avLst/>
-          </a:prstGeom>
-          <a:noFill/>
-          <a:ln/>
-        </p:spPr>
-        <p:txBody>
-          <a:bodyPr wrap="square" lIns="0" tIns="0" rIns="0" bIns="0" rtlCol="0" anchor="t"/>
-          <a:lstStyle/>
-          <a:p>
-            <a:pPr marL="0" indent="0">
-              <a:buNone/>
-            </a:pPr>
-            <a:r>
-              <a:rPr lang="en-US" sz="1100" dirty="0">
-                <a:solidFill>
-                  <a:srgbClr val="94A3B8"/>
-                </a:solidFill>
-                <a:latin typeface="Calibri" pitchFamily="34" charset="0"/>
-                <a:ea typeface="Calibri" pitchFamily="34" charset="-122"/>
-                <a:cs typeface="Calibri" pitchFamily="34" charset="-120"/>
-              </a:rPr>
-              <a:t>15m Landsat patches resized to 64×64 cannot resolve stack geometry or cooling-tower detail that distinguishes fossil-fuel types.</a:t>
-            </a:r>
-            <a:endParaRPr lang="en-US" sz="1100" dirty="0"/>
-          </a:p>
-        </p:txBody>
-      </p:sp>
-      <p:sp>
-        <p:nvSpPr>
-          <p:cNvPr id="9" name="Text 7"/>
-          <p:cNvSpPr/>
-          <p:nvPr/>
-        </p:nvSpPr>
-        <p:spPr>
-          <a:xfrm>
-            <a:off x="777240" y="2971800"/>
-            <a:ext cx="5212080" cy="274320"/>
-          </a:xfrm>
-          <a:prstGeom prst="rect">
-            <a:avLst/>
-          </a:prstGeom>
-          <a:noFill/>
-          <a:ln/>
-        </p:spPr>
-        <p:txBody>
-          <a:bodyPr wrap="square" lIns="0" tIns="0" rIns="0" bIns="0" rtlCol="0" anchor="ctr"/>
-          <a:lstStyle/>
-          <a:p>
-            <a:pPr marL="0" indent="0">
-              <a:buNone/>
-            </a:pPr>
-            <a:r>
-              <a:rPr lang="en-US" sz="1300" b="1" dirty="0">
-                <a:solidFill>
-                  <a:srgbClr val="E2E8F0"/>
-                </a:solidFill>
-                <a:latin typeface="Calibri" pitchFamily="34" charset="0"/>
-                <a:ea typeface="Calibri" pitchFamily="34" charset="-122"/>
-                <a:cs typeface="Calibri" pitchFamily="34" charset="-120"/>
-              </a:rPr>
-              <a:t>Spectral coverage</a:t>
-            </a:r>
-            <a:endParaRPr lang="en-US" sz="1300" dirty="0"/>
-          </a:p>
-        </p:txBody>
-      </p:sp>
-      <p:sp>
-        <p:nvSpPr>
-          <p:cNvPr id="10" name="Text 8"/>
-          <p:cNvSpPr/>
-          <p:nvPr/>
-        </p:nvSpPr>
-        <p:spPr>
-          <a:xfrm>
-            <a:off x="777240" y="3246120"/>
-            <a:ext cx="5212080" cy="685800"/>
-          </a:xfrm>
-          <a:prstGeom prst="rect">
-            <a:avLst/>
-          </a:prstGeom>
-          <a:noFill/>
-          <a:ln/>
-        </p:spPr>
-        <p:txBody>
-          <a:bodyPr wrap="square" lIns="0" tIns="0" rIns="0" bIns="0" rtlCol="0" anchor="t"/>
-          <a:lstStyle/>
-          <a:p>
-            <a:pPr marL="0" indent="0">
-              <a:buNone/>
-            </a:pPr>
-            <a:r>
-              <a:rPr lang="en-US" sz="1100" dirty="0">
-                <a:solidFill>
-                  <a:srgbClr val="94A3B8"/>
-                </a:solidFill>
-                <a:latin typeface="Calibri" pitchFamily="34" charset="0"/>
-                <a:ea typeface="Calibri" pitchFamily="34" charset="-122"/>
-                <a:cs typeface="Calibri" pitchFamily="34" charset="-120"/>
-              </a:rPr>
-              <a:t>RGB-only input ignores thermal infrared (TIRS) bands that directly capture heat signatures from cooling systems and stacks.</a:t>
-            </a:r>
-            <a:endParaRPr lang="en-US" sz="1100" dirty="0"/>
-          </a:p>
-        </p:txBody>
-      </p:sp>
-      <p:sp>
-        <p:nvSpPr>
-          <p:cNvPr id="11" name="Text 9"/>
-          <p:cNvSpPr/>
-          <p:nvPr/>
-        </p:nvSpPr>
-        <p:spPr>
-          <a:xfrm>
-            <a:off x="777240" y="4023360"/>
-            <a:ext cx="5212080" cy="274320"/>
-          </a:xfrm>
-          <a:prstGeom prst="rect">
-            <a:avLst/>
-          </a:prstGeom>
-          <a:noFill/>
-          <a:ln/>
-        </p:spPr>
-        <p:txBody>
-          <a:bodyPr wrap="square" lIns="0" tIns="0" rIns="0" bIns="0" rtlCol="0" anchor="ctr"/>
-          <a:lstStyle/>
-          <a:p>
-            <a:pPr marL="0" indent="0">
-              <a:buNone/>
-            </a:pPr>
-            <a:r>
-              <a:rPr lang="en-US" sz="1300" b="1" dirty="0">
-                <a:solidFill>
-                  <a:srgbClr val="E2E8F0"/>
-                </a:solidFill>
-                <a:latin typeface="Calibri" pitchFamily="34" charset="0"/>
-                <a:ea typeface="Calibri" pitchFamily="34" charset="-122"/>
-                <a:cs typeface="Calibri" pitchFamily="34" charset="-120"/>
-              </a:rPr>
-              <a:t>Temporal snapshot</a:t>
-            </a:r>
-            <a:endParaRPr lang="en-US" sz="1300" dirty="0"/>
-          </a:p>
-        </p:txBody>
-      </p:sp>
-      <p:sp>
-        <p:nvSpPr>
-          <p:cNvPr id="12" name="Text 10"/>
-          <p:cNvSpPr/>
-          <p:nvPr/>
-        </p:nvSpPr>
-        <p:spPr>
-          <a:xfrm>
-            <a:off x="777240" y="4297680"/>
-            <a:ext cx="5212080" cy="685800"/>
-          </a:xfrm>
-          <a:prstGeom prst="rect">
-            <a:avLst/>
-          </a:prstGeom>
-          <a:noFill/>
-          <a:ln/>
-        </p:spPr>
-        <p:txBody>
-          <a:bodyPr wrap="square" lIns="0" tIns="0" rIns="0" bIns="0" rtlCol="0" anchor="t"/>
-          <a:lstStyle/>
-          <a:p>
-            <a:pPr marL="0" indent="0">
-              <a:buNone/>
-            </a:pPr>
-            <a:r>
-              <a:rPr lang="en-US" sz="1100" dirty="0">
-                <a:solidFill>
-                  <a:srgbClr val="94A3B8"/>
-                </a:solidFill>
-                <a:latin typeface="Calibri" pitchFamily="34" charset="0"/>
-                <a:ea typeface="Calibri" pitchFamily="34" charset="-122"/>
-                <a:cs typeface="Calibri" pitchFamily="34" charset="-120"/>
-              </a:rPr>
-              <a:t>Annual eGRID 2014 labels paired with single-image patches and no time alignment with hourly CEMS data or seasonal variation.</a:t>
-            </a:r>
-            <a:endParaRPr lang="en-US" sz="1100" dirty="0"/>
-          </a:p>
-        </p:txBody>
-      </p:sp>
-      <p:sp>
-        <p:nvSpPr>
-          <p:cNvPr id="13" name="Text 11"/>
-          <p:cNvSpPr/>
-          <p:nvPr/>
-        </p:nvSpPr>
-        <p:spPr>
-          <a:xfrm>
-            <a:off x="777240" y="5074920"/>
-            <a:ext cx="5212080" cy="274320"/>
-          </a:xfrm>
-          <a:prstGeom prst="rect">
-            <a:avLst/>
-          </a:prstGeom>
-          <a:noFill/>
-          <a:ln/>
-        </p:spPr>
-        <p:txBody>
-          <a:bodyPr wrap="square" lIns="0" tIns="0" rIns="0" bIns="0" rtlCol="0" anchor="ctr"/>
-          <a:lstStyle/>
-          <a:p>
-            <a:pPr marL="0" indent="0">
-              <a:buNone/>
-            </a:pPr>
-            <a:r>
-              <a:rPr lang="en-US" sz="1300" b="1" dirty="0">
-                <a:solidFill>
-                  <a:srgbClr val="E2E8F0"/>
-                </a:solidFill>
-                <a:latin typeface="Calibri" pitchFamily="34" charset="0"/>
-                <a:ea typeface="Calibri" pitchFamily="34" charset="-122"/>
-                <a:cs typeface="Calibri" pitchFamily="34" charset="-120"/>
-              </a:rPr>
-              <a:t>Geographic scope</a:t>
-            </a:r>
-            <a:endParaRPr lang="en-US" sz="1300" dirty="0"/>
-          </a:p>
-        </p:txBody>
-      </p:sp>
-      <p:sp>
-        <p:nvSpPr>
-          <p:cNvPr id="14" name="Text 12"/>
-          <p:cNvSpPr/>
-          <p:nvPr/>
-        </p:nvSpPr>
-        <p:spPr>
-          <a:xfrm>
-            <a:off x="777240" y="5349240"/>
-            <a:ext cx="5212080" cy="685800"/>
-          </a:xfrm>
-          <a:prstGeom prst="rect">
-            <a:avLst/>
-          </a:prstGeom>
-          <a:noFill/>
-          <a:ln/>
-        </p:spPr>
-        <p:txBody>
-          <a:bodyPr wrap="square" lIns="0" tIns="0" rIns="0" bIns="0" rtlCol="0" anchor="t"/>
-          <a:lstStyle/>
-          <a:p>
-            <a:pPr marL="0" indent="0">
-              <a:buNone/>
-            </a:pPr>
-            <a:r>
-              <a:rPr lang="en-US" sz="1100" dirty="0">
-                <a:solidFill>
-                  <a:srgbClr val="94A3B8"/>
-                </a:solidFill>
-                <a:latin typeface="Calibri" pitchFamily="34" charset="0"/>
-                <a:ea typeface="Calibri" pitchFamily="34" charset="-122"/>
-                <a:cs typeface="Calibri" pitchFamily="34" charset="-120"/>
-              </a:rPr>
-              <a:t>US-only training; generalization to international plants (where independent monitoring matters most) is untested.</a:t>
-            </a:r>
-            <a:endParaRPr lang="en-US" sz="1100" dirty="0"/>
-          </a:p>
-        </p:txBody>
-      </p:sp>
-      <p:sp>
-        <p:nvSpPr>
-          <p:cNvPr id="15" name="Shape 13"/>
-          <p:cNvSpPr/>
-          <p:nvPr/>
-        </p:nvSpPr>
-        <p:spPr>
-          <a:xfrm>
-            <a:off x="6492240" y="1463040"/>
-            <a:ext cx="5212080" cy="4754880"/>
-          </a:xfrm>
-          <a:prstGeom prst="rect">
-            <a:avLst/>
-          </a:prstGeom>
-          <a:solidFill>
-            <a:srgbClr val="13243A"/>
-          </a:solidFill>
-          <a:ln w="12700">
-            <a:solidFill>
-              <a:srgbClr val="13243A"/>
-            </a:solidFill>
-            <a:prstDash val="solid"/>
-          </a:ln>
-        </p:spPr>
-        <p:txBody>
-          <a:bodyPr/>
-          <a:lstStyle/>
-          <a:p>
-            <a:endParaRPr lang="en-US"/>
-          </a:p>
-        </p:txBody>
-      </p:sp>
-      <p:sp>
-        <p:nvSpPr>
-          <p:cNvPr id="16" name="Shape 14"/>
-          <p:cNvSpPr/>
-          <p:nvPr/>
-        </p:nvSpPr>
-        <p:spPr>
-          <a:xfrm>
-            <a:off x="6492240" y="1463040"/>
-            <a:ext cx="73152" cy="4754880"/>
-          </a:xfrm>
-          <a:prstGeom prst="rect">
-            <a:avLst/>
-          </a:prstGeom>
-          <a:solidFill>
-            <a:srgbClr val="2DD4BF"/>
-          </a:solidFill>
-          <a:ln w="12700">
-            <a:solidFill>
-              <a:srgbClr val="2DD4BF"/>
-            </a:solidFill>
-            <a:prstDash val="solid"/>
-          </a:ln>
-        </p:spPr>
-        <p:txBody>
-          <a:bodyPr/>
-          <a:lstStyle/>
-          <a:p>
-            <a:endParaRPr lang="en-US"/>
-          </a:p>
-        </p:txBody>
-      </p:sp>
-      <p:sp>
-        <p:nvSpPr>
-          <p:cNvPr id="17" name="Text 15"/>
-          <p:cNvSpPr/>
-          <p:nvPr/>
-        </p:nvSpPr>
-        <p:spPr>
-          <a:xfrm>
-            <a:off x="6720840" y="1600200"/>
-            <a:ext cx="4846320" cy="274320"/>
-          </a:xfrm>
-          <a:prstGeom prst="rect">
-            <a:avLst/>
-          </a:prstGeom>
-          <a:noFill/>
-          <a:ln/>
-        </p:spPr>
-        <p:txBody>
-          <a:bodyPr wrap="square" lIns="0" tIns="0" rIns="0" bIns="0" rtlCol="0" anchor="ctr"/>
-          <a:lstStyle/>
-          <a:p>
-            <a:pPr marL="0" indent="0">
-              <a:buNone/>
-            </a:pPr>
-            <a:r>
-              <a:rPr lang="en-US" sz="1100" b="1" kern="0" spc="300" dirty="0">
-                <a:solidFill>
-                  <a:srgbClr val="2DD4BF"/>
-                </a:solidFill>
-                <a:latin typeface="Calibri" pitchFamily="34" charset="0"/>
-                <a:ea typeface="Calibri" pitchFamily="34" charset="-122"/>
-                <a:cs typeface="Calibri" pitchFamily="34" charset="-120"/>
-              </a:rPr>
-              <a:t>RECOMMENDED NEXT STEPS</a:t>
-            </a:r>
-            <a:endParaRPr lang="en-US" sz="1100" dirty="0"/>
-          </a:p>
-        </p:txBody>
-      </p:sp>
-      <p:sp>
-        <p:nvSpPr>
-          <p:cNvPr id="18" name="Text 16"/>
-          <p:cNvSpPr/>
-          <p:nvPr/>
-        </p:nvSpPr>
-        <p:spPr>
-          <a:xfrm>
-            <a:off x="6812280" y="1920240"/>
-            <a:ext cx="548640" cy="365760"/>
-          </a:xfrm>
-          <a:prstGeom prst="rect">
-            <a:avLst/>
-          </a:prstGeom>
-          <a:noFill/>
-          <a:ln/>
-        </p:spPr>
-        <p:txBody>
-          <a:bodyPr wrap="square" lIns="0" tIns="0" rIns="0" bIns="0" rtlCol="0" anchor="ctr"/>
-          <a:lstStyle/>
-          <a:p>
-            <a:pPr marL="0" indent="0">
-              <a:buNone/>
-            </a:pPr>
-            <a:r>
-              <a:rPr lang="en-US" sz="1600" b="1" dirty="0">
-                <a:solidFill>
-                  <a:srgbClr val="2DD4BF"/>
-                </a:solidFill>
-                <a:latin typeface="Georgia" pitchFamily="34" charset="0"/>
-                <a:ea typeface="Georgia" pitchFamily="34" charset="-122"/>
-                <a:cs typeface="Georgia" pitchFamily="34" charset="-120"/>
-              </a:rPr>
-              <a:t>01</a:t>
-            </a:r>
-            <a:endParaRPr lang="en-US" sz="1600" dirty="0"/>
-          </a:p>
-        </p:txBody>
-      </p:sp>
-      <p:sp>
-        <p:nvSpPr>
-          <p:cNvPr id="19" name="Text 17"/>
-          <p:cNvSpPr/>
-          <p:nvPr/>
-        </p:nvSpPr>
-        <p:spPr>
-          <a:xfrm>
-            <a:off x="7406640" y="1920240"/>
-            <a:ext cx="4206240" cy="274320"/>
-          </a:xfrm>
-          <a:prstGeom prst="rect">
-            <a:avLst/>
-          </a:prstGeom>
-          <a:noFill/>
-          <a:ln/>
-        </p:spPr>
-        <p:txBody>
-          <a:bodyPr wrap="square" lIns="0" tIns="0" rIns="0" bIns="0" rtlCol="0" anchor="ctr"/>
-          <a:lstStyle/>
-          <a:p>
-            <a:pPr marL="0" indent="0">
-              <a:buNone/>
-            </a:pPr>
-            <a:r>
-              <a:rPr lang="en-US" sz="1300" b="1" dirty="0">
-                <a:solidFill>
-                  <a:srgbClr val="E2E8F0"/>
-                </a:solidFill>
-                <a:latin typeface="Calibri" pitchFamily="34" charset="0"/>
-                <a:ea typeface="Calibri" pitchFamily="34" charset="-122"/>
-                <a:cs typeface="Calibri" pitchFamily="34" charset="-120"/>
-              </a:rPr>
-              <a:t>Upgrade imagery</a:t>
-            </a:r>
-            <a:endParaRPr lang="en-US" sz="1300" dirty="0"/>
-          </a:p>
-        </p:txBody>
-      </p:sp>
-      <p:sp>
-        <p:nvSpPr>
-          <p:cNvPr id="20" name="Text 18"/>
-          <p:cNvSpPr/>
-          <p:nvPr/>
-        </p:nvSpPr>
-        <p:spPr>
-          <a:xfrm>
-            <a:off x="7406640" y="2194560"/>
-            <a:ext cx="4206240" cy="685800"/>
-          </a:xfrm>
-          <a:prstGeom prst="rect">
-            <a:avLst/>
-          </a:prstGeom>
-          <a:noFill/>
-          <a:ln/>
-        </p:spPr>
-        <p:txBody>
-          <a:bodyPr wrap="square" lIns="0" tIns="0" rIns="0" bIns="0" rtlCol="0" anchor="t"/>
-          <a:lstStyle/>
-          <a:p>
-            <a:pPr marL="0" indent="0">
-              <a:buNone/>
-            </a:pPr>
-            <a:r>
-              <a:rPr lang="en-US" sz="1100" dirty="0">
-                <a:solidFill>
-                  <a:srgbClr val="94A3B8"/>
-                </a:solidFill>
-                <a:latin typeface="Calibri" pitchFamily="34" charset="0"/>
-                <a:ea typeface="Calibri" pitchFamily="34" charset="-122"/>
-                <a:cs typeface="Calibri" pitchFamily="34" charset="-120"/>
-              </a:rPr>
-              <a:t>Add NAIP 1m/px for detail and Landsat TIRS thermal bands for heat signatures so it directly targets fossil-fuel confusion.</a:t>
-            </a:r>
-            <a:endParaRPr lang="en-US" sz="1100" dirty="0"/>
-          </a:p>
-        </p:txBody>
-      </p:sp>
-      <p:sp>
-        <p:nvSpPr>
-          <p:cNvPr id="21" name="Text 19"/>
-          <p:cNvSpPr/>
-          <p:nvPr/>
-        </p:nvSpPr>
-        <p:spPr>
-          <a:xfrm>
-            <a:off x="6812280" y="2971800"/>
-            <a:ext cx="548640" cy="365760"/>
-          </a:xfrm>
-          <a:prstGeom prst="rect">
-            <a:avLst/>
-          </a:prstGeom>
-          <a:noFill/>
-          <a:ln/>
-        </p:spPr>
-        <p:txBody>
-          <a:bodyPr wrap="square" lIns="0" tIns="0" rIns="0" bIns="0" rtlCol="0" anchor="ctr"/>
-          <a:lstStyle/>
-          <a:p>
-            <a:pPr marL="0" indent="0">
-              <a:buNone/>
-            </a:pPr>
-            <a:r>
-              <a:rPr lang="en-US" sz="1600" b="1" dirty="0">
-                <a:solidFill>
-                  <a:srgbClr val="2DD4BF"/>
-                </a:solidFill>
-                <a:latin typeface="Georgia" pitchFamily="34" charset="0"/>
-                <a:ea typeface="Georgia" pitchFamily="34" charset="-122"/>
-                <a:cs typeface="Georgia" pitchFamily="34" charset="-120"/>
-              </a:rPr>
-              <a:t>02</a:t>
-            </a:r>
-            <a:endParaRPr lang="en-US" sz="1600" dirty="0"/>
-          </a:p>
-        </p:txBody>
-      </p:sp>
-      <p:sp>
-        <p:nvSpPr>
-          <p:cNvPr id="22" name="Text 20"/>
-          <p:cNvSpPr/>
-          <p:nvPr/>
-        </p:nvSpPr>
-        <p:spPr>
-          <a:xfrm>
-            <a:off x="7406640" y="2971800"/>
-            <a:ext cx="4206240" cy="274320"/>
-          </a:xfrm>
-          <a:prstGeom prst="rect">
-            <a:avLst/>
-          </a:prstGeom>
-          <a:noFill/>
-          <a:ln/>
-        </p:spPr>
-        <p:txBody>
-          <a:bodyPr wrap="square" lIns="0" tIns="0" rIns="0" bIns="0" rtlCol="0" anchor="ctr"/>
-          <a:lstStyle/>
-          <a:p>
-            <a:pPr marL="0" indent="0">
-              <a:buNone/>
-            </a:pPr>
-            <a:r>
-              <a:rPr lang="en-US" sz="1300" b="1" dirty="0">
-                <a:solidFill>
-                  <a:srgbClr val="E2E8F0"/>
-                </a:solidFill>
-                <a:latin typeface="Calibri" pitchFamily="34" charset="0"/>
-                <a:ea typeface="Calibri" pitchFamily="34" charset="-122"/>
-                <a:cs typeface="Calibri" pitchFamily="34" charset="-120"/>
-              </a:rPr>
-              <a:t>Time-align labels</a:t>
-            </a:r>
-            <a:endParaRPr lang="en-US" sz="1300" dirty="0"/>
-          </a:p>
-        </p:txBody>
-      </p:sp>
-      <p:sp>
-        <p:nvSpPr>
-          <p:cNvPr id="23" name="Text 21"/>
-          <p:cNvSpPr/>
-          <p:nvPr/>
-        </p:nvSpPr>
-        <p:spPr>
-          <a:xfrm>
-            <a:off x="7406640" y="3246120"/>
-            <a:ext cx="4206240" cy="685800"/>
-          </a:xfrm>
-          <a:prstGeom prst="rect">
-            <a:avLst/>
-          </a:prstGeom>
-          <a:noFill/>
-          <a:ln/>
-        </p:spPr>
-        <p:txBody>
-          <a:bodyPr wrap="square" lIns="0" tIns="0" rIns="0" bIns="0" rtlCol="0" anchor="t"/>
-          <a:lstStyle/>
-          <a:p>
-            <a:pPr marL="0" indent="0">
-              <a:buNone/>
-            </a:pPr>
-            <a:r>
-              <a:rPr lang="en-US" sz="1100" dirty="0">
-                <a:solidFill>
-                  <a:srgbClr val="94A3B8"/>
-                </a:solidFill>
-                <a:latin typeface="Calibri" pitchFamily="34" charset="0"/>
-                <a:ea typeface="Calibri" pitchFamily="34" charset="-122"/>
-                <a:cs typeface="Calibri" pitchFamily="34" charset="-120"/>
-              </a:rPr>
-              <a:t>Use EPA CAMPD hourly CEMS data matched to image acquisition dates (turns the regression into a true continuous signal).</a:t>
-            </a:r>
-            <a:endParaRPr lang="en-US" sz="1100" dirty="0"/>
-          </a:p>
-        </p:txBody>
-      </p:sp>
-      <p:sp>
-        <p:nvSpPr>
-          <p:cNvPr id="24" name="Text 22"/>
-          <p:cNvSpPr/>
-          <p:nvPr/>
-        </p:nvSpPr>
-        <p:spPr>
-          <a:xfrm>
-            <a:off x="6812280" y="4023360"/>
-            <a:ext cx="548640" cy="365760"/>
-          </a:xfrm>
-          <a:prstGeom prst="rect">
-            <a:avLst/>
-          </a:prstGeom>
-          <a:noFill/>
-          <a:ln/>
-        </p:spPr>
-        <p:txBody>
-          <a:bodyPr wrap="square" lIns="0" tIns="0" rIns="0" bIns="0" rtlCol="0" anchor="ctr"/>
-          <a:lstStyle/>
-          <a:p>
-            <a:pPr marL="0" indent="0">
-              <a:buNone/>
-            </a:pPr>
-            <a:r>
-              <a:rPr lang="en-US" sz="1600" b="1" dirty="0">
-                <a:solidFill>
-                  <a:srgbClr val="2DD4BF"/>
-                </a:solidFill>
-                <a:latin typeface="Georgia" pitchFamily="34" charset="0"/>
-                <a:ea typeface="Georgia" pitchFamily="34" charset="-122"/>
-                <a:cs typeface="Georgia" pitchFamily="34" charset="-120"/>
-              </a:rPr>
-              <a:t>03</a:t>
-            </a:r>
-            <a:endParaRPr lang="en-US" sz="1600" dirty="0"/>
-          </a:p>
-        </p:txBody>
-      </p:sp>
-      <p:sp>
-        <p:nvSpPr>
-          <p:cNvPr id="25" name="Text 23"/>
-          <p:cNvSpPr/>
-          <p:nvPr/>
-        </p:nvSpPr>
-        <p:spPr>
-          <a:xfrm>
-            <a:off x="7406640" y="4023360"/>
-            <a:ext cx="4206240" cy="274320"/>
-          </a:xfrm>
-          <a:prstGeom prst="rect">
-            <a:avLst/>
-          </a:prstGeom>
-          <a:noFill/>
-          <a:ln/>
-        </p:spPr>
-        <p:txBody>
-          <a:bodyPr wrap="square" lIns="0" tIns="0" rIns="0" bIns="0" rtlCol="0" anchor="ctr"/>
-          <a:lstStyle/>
-          <a:p>
-            <a:pPr marL="0" indent="0">
-              <a:buNone/>
-            </a:pPr>
-            <a:r>
-              <a:rPr lang="en-US" sz="1300" b="1" dirty="0">
-                <a:solidFill>
-                  <a:srgbClr val="E2E8F0"/>
-                </a:solidFill>
-                <a:latin typeface="Calibri" pitchFamily="34" charset="0"/>
-                <a:ea typeface="Calibri" pitchFamily="34" charset="-122"/>
-                <a:cs typeface="Calibri" pitchFamily="34" charset="-120"/>
-              </a:rPr>
-              <a:t>Pilot anomaly watchlist</a:t>
-            </a:r>
-            <a:endParaRPr lang="en-US" sz="1300" dirty="0"/>
-          </a:p>
-        </p:txBody>
-      </p:sp>
-      <p:sp>
-        <p:nvSpPr>
-          <p:cNvPr id="26" name="Text 24"/>
-          <p:cNvSpPr/>
-          <p:nvPr/>
-        </p:nvSpPr>
-        <p:spPr>
-          <a:xfrm>
-            <a:off x="7406640" y="4297680"/>
-            <a:ext cx="4206240" cy="685800"/>
-          </a:xfrm>
-          <a:prstGeom prst="rect">
-            <a:avLst/>
-          </a:prstGeom>
-          <a:noFill/>
-          <a:ln/>
-        </p:spPr>
-        <p:txBody>
-          <a:bodyPr wrap="square" lIns="0" tIns="0" rIns="0" bIns="0" rtlCol="0" anchor="t"/>
-          <a:lstStyle/>
-          <a:p>
-            <a:pPr marL="0" indent="0">
-              <a:buNone/>
-            </a:pPr>
-            <a:r>
-              <a:rPr lang="en-US" sz="1100" dirty="0">
-                <a:solidFill>
-                  <a:srgbClr val="94A3B8"/>
-                </a:solidFill>
-                <a:latin typeface="Calibri" pitchFamily="34" charset="0"/>
-                <a:ea typeface="Calibri" pitchFamily="34" charset="-122"/>
-                <a:cs typeface="Calibri" pitchFamily="34" charset="-120"/>
-              </a:rPr>
-              <a:t>Run Task 4 ensemble on flagged plants with a regulatory partner; measure precision of follow-up investigations.</a:t>
-            </a:r>
-            <a:endParaRPr lang="en-US" sz="1100" dirty="0"/>
-          </a:p>
-        </p:txBody>
-      </p:sp>
-      <p:sp>
-        <p:nvSpPr>
-          <p:cNvPr id="27" name="Text 25"/>
-          <p:cNvSpPr/>
-          <p:nvPr/>
-        </p:nvSpPr>
-        <p:spPr>
-          <a:xfrm>
-            <a:off x="6812280" y="5074920"/>
-            <a:ext cx="548640" cy="365760"/>
-          </a:xfrm>
-          <a:prstGeom prst="rect">
-            <a:avLst/>
-          </a:prstGeom>
-          <a:noFill/>
-          <a:ln/>
-        </p:spPr>
-        <p:txBody>
-          <a:bodyPr wrap="square" lIns="0" tIns="0" rIns="0" bIns="0" rtlCol="0" anchor="ctr"/>
-          <a:lstStyle/>
-          <a:p>
-            <a:pPr marL="0" indent="0">
-              <a:buNone/>
-            </a:pPr>
-            <a:r>
-              <a:rPr lang="en-US" sz="1600" b="1" dirty="0">
-                <a:solidFill>
-                  <a:srgbClr val="2DD4BF"/>
-                </a:solidFill>
-                <a:latin typeface="Georgia" pitchFamily="34" charset="0"/>
-                <a:ea typeface="Georgia" pitchFamily="34" charset="-122"/>
-                <a:cs typeface="Georgia" pitchFamily="34" charset="-120"/>
-              </a:rPr>
-              <a:t>04</a:t>
-            </a:r>
-            <a:endParaRPr lang="en-US" sz="1600" dirty="0"/>
-          </a:p>
-        </p:txBody>
-      </p:sp>
-      <p:sp>
-        <p:nvSpPr>
-          <p:cNvPr id="28" name="Text 26"/>
-          <p:cNvSpPr/>
-          <p:nvPr/>
-        </p:nvSpPr>
-        <p:spPr>
-          <a:xfrm>
-            <a:off x="7406640" y="5074920"/>
-            <a:ext cx="4206240" cy="274320"/>
-          </a:xfrm>
-          <a:prstGeom prst="rect">
-            <a:avLst/>
-          </a:prstGeom>
-          <a:noFill/>
-          <a:ln/>
-        </p:spPr>
-        <p:txBody>
-          <a:bodyPr wrap="square" lIns="0" tIns="0" rIns="0" bIns="0" rtlCol="0" anchor="ctr"/>
-          <a:lstStyle/>
-          <a:p>
-            <a:pPr marL="0" indent="0">
-              <a:buNone/>
-            </a:pPr>
-            <a:r>
-              <a:rPr lang="en-US" sz="1300" b="1" dirty="0">
-                <a:solidFill>
-                  <a:srgbClr val="E2E8F0"/>
-                </a:solidFill>
-                <a:latin typeface="Calibri" pitchFamily="34" charset="0"/>
-                <a:ea typeface="Calibri" pitchFamily="34" charset="-122"/>
-                <a:cs typeface="Calibri" pitchFamily="34" charset="-120"/>
-              </a:rPr>
-              <a:t>Generalize globally</a:t>
-            </a:r>
-            <a:endParaRPr lang="en-US" sz="1300" dirty="0"/>
-          </a:p>
-        </p:txBody>
-      </p:sp>
-      <p:sp>
-        <p:nvSpPr>
-          <p:cNvPr id="29" name="Text 27"/>
-          <p:cNvSpPr/>
-          <p:nvPr/>
-        </p:nvSpPr>
-        <p:spPr>
-          <a:xfrm>
-            <a:off x="7406640" y="5349240"/>
-            <a:ext cx="4206240" cy="685800"/>
-          </a:xfrm>
-          <a:prstGeom prst="rect">
-            <a:avLst/>
-          </a:prstGeom>
-          <a:noFill/>
-          <a:ln/>
-        </p:spPr>
-        <p:txBody>
-          <a:bodyPr wrap="square" lIns="0" tIns="0" rIns="0" bIns="0" rtlCol="0" anchor="t"/>
-          <a:lstStyle/>
-          <a:p>
-            <a:pPr marL="0" indent="0">
-              <a:buNone/>
-            </a:pPr>
-            <a:r>
-              <a:rPr lang="en-US" sz="1100" dirty="0">
-                <a:solidFill>
-                  <a:srgbClr val="94A3B8"/>
-                </a:solidFill>
-                <a:latin typeface="Calibri" pitchFamily="34" charset="0"/>
-                <a:ea typeface="Calibri" pitchFamily="34" charset="-122"/>
-                <a:cs typeface="Calibri" pitchFamily="34" charset="-120"/>
-              </a:rPr>
-              <a:t>Extend to WRI Global Power Plant Database and test whether the model holds in jurisdictions with weaker reporting.</a:t>
-            </a:r>
-            <a:endParaRPr lang="en-US" sz="1100" dirty="0"/>
-          </a:p>
-        </p:txBody>
-      </p:sp>
-      <p:sp>
-        <p:nvSpPr>
-          <p:cNvPr id="30" name="Text 28"/>
-          <p:cNvSpPr/>
-          <p:nvPr/>
-        </p:nvSpPr>
-        <p:spPr>
-          <a:xfrm>
-            <a:off x="457200" y="6492240"/>
-            <a:ext cx="7315200" cy="274320"/>
-          </a:xfrm>
-          <a:prstGeom prst="rect">
-            <a:avLst/>
-          </a:prstGeom>
-          <a:noFill/>
-          <a:ln/>
-        </p:spPr>
-        <p:txBody>
-          <a:bodyPr wrap="square" lIns="0" tIns="0" rIns="0" bIns="0" rtlCol="0" anchor="ctr"/>
-          <a:lstStyle/>
-          <a:p>
-            <a:pPr marL="0" indent="0">
-              <a:buNone/>
-            </a:pPr>
-            <a:r>
-              <a:rPr lang="en-US" sz="900" dirty="0">
-                <a:solidFill>
-                  <a:srgbClr val="64748B"/>
-                </a:solidFill>
-                <a:latin typeface="Calibri" pitchFamily="34" charset="0"/>
-                <a:ea typeface="Calibri" pitchFamily="34" charset="-122"/>
-                <a:cs typeface="Calibri" pitchFamily="34" charset="-120"/>
-              </a:rPr>
-              <a:t>Emissions from Above  ·  Scott · Sen · Ronquillo · Rodriguez</a:t>
-            </a:r>
-            <a:endParaRPr lang="en-US" sz="900" dirty="0"/>
-          </a:p>
-        </p:txBody>
-      </p:sp>
-      <p:sp>
-        <p:nvSpPr>
-          <p:cNvPr id="31" name="Text 29"/>
-          <p:cNvSpPr/>
-          <p:nvPr/>
-        </p:nvSpPr>
-        <p:spPr>
-          <a:xfrm>
-            <a:off x="10972800" y="6492240"/>
-            <a:ext cx="731520" cy="274320"/>
-          </a:xfrm>
-          <a:prstGeom prst="rect">
-            <a:avLst/>
-          </a:prstGeom>
-          <a:noFill/>
-          <a:ln/>
-        </p:spPr>
-        <p:txBody>
-          <a:bodyPr wrap="square" lIns="0" tIns="0" rIns="0" bIns="0" rtlCol="0" anchor="ctr"/>
-          <a:lstStyle/>
-          <a:p>
-            <a:pPr marL="0" indent="0" algn="r">
-              <a:buNone/>
-            </a:pPr>
-            <a:r>
-              <a:rPr lang="en-US" sz="900" dirty="0">
-                <a:solidFill>
-                  <a:srgbClr val="64748B"/>
-                </a:solidFill>
-                <a:latin typeface="Calibri" pitchFamily="34" charset="0"/>
-                <a:ea typeface="Calibri" pitchFamily="34" charset="-122"/>
-                <a:cs typeface="Calibri" pitchFamily="34" charset="-120"/>
-              </a:rPr>
-              <a:t>7 / 12</a:t>
-            </a:r>
-            <a:endParaRPr lang="en-US" sz="900" dirty="0"/>
-          </a:p>
-        </p:txBody>
-      </p:sp>
-    </p:spTree>
-  </p:cSld>
-  <p:clrMapOvr>
-    <a:masterClrMapping/>
-  </p:clrMapOvr>
-</p:sld>
-</file>
-
-<file path=ppt/slides/slide8.xml><?xml version="1.0" encoding="utf-8"?>
-<p:sld xmlns:a="http://schemas.openxmlformats.org/drawingml/2006/main" xmlns:r="http://schemas.openxmlformats.org/officeDocument/2006/relationships" xmlns:p="http://schemas.openxmlformats.org/presentationml/2006/main">
   <p:cSld name="Slide 10">
     <p:bg>
       <p:bgPr>
@@ -11993,7 +11432,7 @@
 </p:sld>
 </file>
 
-<file path=ppt/slides/slide9.xml><?xml version="1.0" encoding="utf-8"?>
+<file path=ppt/slides/slide8.xml><?xml version="1.0" encoding="utf-8"?>
 <p:sld xmlns:a="http://schemas.openxmlformats.org/drawingml/2006/main" xmlns:r="http://schemas.openxmlformats.org/officeDocument/2006/relationships" xmlns:p="http://schemas.openxmlformats.org/presentationml/2006/main">
   <p:cSld name="Slide 11">
     <p:bg>
@@ -12049,7 +11488,7 @@
                 </a:solidFill>
                 <a:latin typeface="Calibri" pitchFamily="34" charset="0"/>
               </a:rPr>
-              <a:t>08  ·  TASK 4 RESULTS</a:t>
+              <a:t>07  ·  TASK 4 RESULTS</a:t>
             </a:r>
           </a:p>
         </p:txBody>
@@ -12926,6 +12365,567 @@
                 <a:latin typeface="Calibri" pitchFamily="34" charset="0"/>
               </a:rPr>
               <a:t>11 / 12</a:t>
+            </a:r>
+          </a:p>
+        </p:txBody>
+      </p:sp>
+    </p:spTree>
+  </p:cSld>
+  <p:clrMapOvr>
+    <a:masterClrMapping/>
+  </p:clrMapOvr>
+</p:sld>
+</file>
+
+<file path=ppt/slides/slide9.xml><?xml version="1.0" encoding="utf-8"?>
+<p:sld xmlns:a="http://schemas.openxmlformats.org/drawingml/2006/main" xmlns:r="http://schemas.openxmlformats.org/officeDocument/2006/relationships" xmlns:p="http://schemas.openxmlformats.org/presentationml/2006/main">
+  <p:cSld name="Slide 12">
+    <p:bg>
+      <p:bgPr>
+        <a:solidFill>
+          <a:srgbClr val="0B1929"/>
+        </a:solidFill>
+        <a:effectLst/>
+      </p:bgPr>
+    </p:bg>
+    <p:spTree>
+      <p:nvGrpSpPr>
+        <p:cNvPr id="1" name=""/>
+        <p:cNvGrpSpPr/>
+        <p:nvPr/>
+      </p:nvGrpSpPr>
+      <p:grpSpPr>
+        <a:xfrm>
+          <a:off x="0" y="0"/>
+          <a:ext cx="0" cy="0"/>
+          <a:chOff x="0" y="0"/>
+          <a:chExt cx="0" cy="0"/>
+        </a:xfrm>
+      </p:grpSpPr>
+      <p:sp>
+        <p:nvSpPr>
+          <p:cNvPr id="2" name="label"/>
+          <p:cNvSpPr/>
+          <p:nvPr/>
+        </p:nvSpPr>
+        <p:spPr>
+          <a:xfrm>
+            <a:off x="457200" y="274320"/>
+            <a:ext cx="11247120" cy="274320"/>
+          </a:xfrm>
+          <a:prstGeom prst="rect">
+            <a:avLst/>
+          </a:prstGeom>
+          <a:noFill/>
+          <a:ln/>
+        </p:spPr>
+        <p:txBody>
+          <a:bodyPr wrap="square" lIns="0" tIns="0" rIns="0" bIns="0" rtlCol="0" anchor="ctr"/>
+          <a:lstStyle/>
+          <a:p>
+            <a:pPr marL="0" indent="0">
+              <a:buNone/>
+            </a:pPr>
+            <a:r>
+              <a:rPr lang="en-US" sz="1000" b="1" kern="0" spc="400" dirty="0">
+                <a:solidFill>
+                  <a:srgbClr val="2DD4BF"/>
+                </a:solidFill>
+                <a:latin typeface="Calibri" pitchFamily="34" charset="0"/>
+              </a:rPr>
+              <a:t>08  ·  TASK 4 RESULTS  —  ANOMALY SCORES BY FUEL TYPE &amp; GEOGRAPHY</a:t>
+            </a:r>
+          </a:p>
+        </p:txBody>
+      </p:sp>
+      <p:sp>
+        <p:nvSpPr>
+          <p:cNvPr id="3" name="title"/>
+          <p:cNvSpPr/>
+          <p:nvPr/>
+        </p:nvSpPr>
+        <p:spPr>
+          <a:xfrm>
+            <a:off x="457200" y="548640"/>
+            <a:ext cx="11247120" cy="548640"/>
+          </a:xfrm>
+          <a:prstGeom prst="rect">
+            <a:avLst/>
+          </a:prstGeom>
+          <a:noFill/>
+          <a:ln/>
+        </p:spPr>
+        <p:txBody>
+          <a:bodyPr wrap="square" lIns="0" tIns="0" rIns="0" bIns="0" rtlCol="0" anchor="t"/>
+          <a:lstStyle/>
+          <a:p>
+            <a:pPr marL="0" indent="0">
+              <a:buNone/>
+            </a:pPr>
+            <a:r>
+              <a:rPr lang="en-US" sz="2600" b="1" dirty="0">
+                <a:solidFill>
+                  <a:srgbClr val="E2E8F0"/>
+                </a:solidFill>
+                <a:latin typeface="Georgia" pitchFamily="34" charset="0"/>
+              </a:rPr>
+              <a:t>NUCLEAR and COAL carry the highest anomaly scores</a:t>
+            </a:r>
+          </a:p>
+        </p:txBody>
+      </p:sp>
+      <p:pic>
+        <p:nvPicPr>
+          <p:cNvPr id="4" name="fuel_chart"/>
+          <p:cNvPicPr>
+            <a:picLocks noChangeAspect="1"/>
+          </p:cNvPicPr>
+          <p:nvPr/>
+        </p:nvPicPr>
+        <p:blipFill>
+          <a:blip r:embed="rId2"/>
+          <a:stretch>
+            <a:fillRect/>
+          </a:stretch>
+        </p:blipFill>
+        <p:spPr>
+          <a:xfrm>
+            <a:off x="457200" y="1371600"/>
+            <a:ext cx="8494036" cy="2950000"/>
+          </a:xfrm>
+          <a:prstGeom prst="rect">
+            <a:avLst/>
+          </a:prstGeom>
+        </p:spPr>
+      </p:pic>
+      <p:sp>
+        <p:nvSpPr>
+          <p:cNvPr id="5" name="findingsbg"/>
+          <p:cNvSpPr/>
+          <p:nvPr/>
+        </p:nvSpPr>
+        <p:spPr>
+          <a:xfrm>
+            <a:off x="9124560" y="1371600"/>
+            <a:ext cx="2580480" cy="2950000"/>
+          </a:xfrm>
+          <a:prstGeom prst="rect">
+            <a:avLst/>
+          </a:prstGeom>
+          <a:solidFill>
+            <a:srgbClr val="13243A"/>
+          </a:solidFill>
+          <a:ln w="12700">
+            <a:solidFill>
+              <a:srgbClr val="13243A"/>
+            </a:solidFill>
+          </a:ln>
+        </p:spPr>
+        <p:txBody>
+          <a:bodyPr/>
+          <a:lstStyle/>
+          <a:p>
+            <a:endParaRPr lang="en-US"/>
+          </a:p>
+        </p:txBody>
+      </p:sp>
+      <p:sp>
+        <p:nvSpPr>
+          <p:cNvPr id="6" name="findingsside"/>
+          <p:cNvSpPr/>
+          <p:nvPr/>
+        </p:nvSpPr>
+        <p:spPr>
+          <a:xfrm>
+            <a:off x="9124560" y="1371600"/>
+            <a:ext cx="73152" cy="2950000"/>
+          </a:xfrm>
+          <a:prstGeom prst="rect">
+            <a:avLst/>
+          </a:prstGeom>
+          <a:solidFill>
+            <a:srgbClr val="2DD4BF"/>
+          </a:solidFill>
+          <a:ln w="12700">
+            <a:solidFill>
+              <a:srgbClr val="2DD4BF"/>
+            </a:solidFill>
+          </a:ln>
+        </p:spPr>
+        <p:txBody>
+          <a:bodyPr/>
+          <a:lstStyle/>
+          <a:p>
+            <a:endParaRPr lang="en-US"/>
+          </a:p>
+        </p:txBody>
+      </p:sp>
+      <p:sp>
+        <p:nvSpPr>
+          <p:cNvPr id="7" name="findingslbl"/>
+          <p:cNvSpPr/>
+          <p:nvPr/>
+        </p:nvSpPr>
+        <p:spPr>
+          <a:xfrm>
+            <a:off x="9353160" y="1462560"/>
+            <a:ext cx="2251800" cy="274320"/>
+          </a:xfrm>
+          <a:prstGeom prst="rect">
+            <a:avLst/>
+          </a:prstGeom>
+          <a:noFill/>
+          <a:ln/>
+        </p:spPr>
+        <p:txBody>
+          <a:bodyPr wrap="square" lIns="0" tIns="0" rIns="0" bIns="0" rtlCol="0" anchor="ctr"/>
+          <a:lstStyle/>
+          <a:p>
+            <a:pPr marL="0" indent="0">
+              <a:buNone/>
+            </a:pPr>
+            <a:r>
+              <a:rPr lang="en-US" sz="1100" b="1" kern="0" spc="300" dirty="0">
+                <a:solidFill>
+                  <a:srgbClr val="2DD4BF"/>
+                </a:solidFill>
+                <a:latin typeface="Calibri" pitchFamily="34" charset="0"/>
+              </a:rPr>
+              <a:t>KEY FINDINGS</a:t>
+            </a:r>
+          </a:p>
+        </p:txBody>
+      </p:sp>
+      <p:sp>
+        <p:nvSpPr>
+          <p:cNvPr id="8" name="findingstext"/>
+          <p:cNvSpPr/>
+          <p:nvPr/>
+        </p:nvSpPr>
+        <p:spPr>
+          <a:xfrm>
+            <a:off x="9353160" y="1828320"/>
+            <a:ext cx="2251800" cy="2194560"/>
+          </a:xfrm>
+          <a:prstGeom prst="rect">
+            <a:avLst/>
+          </a:prstGeom>
+          <a:noFill/>
+          <a:ln/>
+        </p:spPr>
+        <p:txBody>
+          <a:bodyPr wrap="square" lIns="0" tIns="0" rIns="0" bIns="0" rtlCol="0" anchor="t"/>
+          <a:lstStyle/>
+          <a:p>
+            <a:pPr marL="342900" indent="-342900">
+              <a:spcAft>
+                <a:spcPts val="400"/>
+              </a:spcAft>
+              <a:buSzPct val="100000"/>
+              <a:buChar char="▸"/>
+            </a:pPr>
+            <a:r>
+              <a:rPr lang="en-US" sz="1100" dirty="0">
+                <a:solidFill>
+                  <a:srgbClr val="E2E8F0"/>
+                </a:solidFill>
+                <a:latin typeface="Calibri" pitchFamily="34" charset="0"/>
+              </a:rPr>
+              <a:t>NUCLEAR median score ~0.40 is the highest across all fuel classes.</a:t>
+            </a:r>
+          </a:p>
+          <a:p>
+            <a:pPr marL="0" indent="0">
+              <a:spcAft>
+                <a:spcPts val="200"/>
+              </a:spcAft>
+              <a:buNone/>
+            </a:pPr>
+            <a:r>
+              <a:rPr lang="en-US" sz="400" dirty="0">
+                <a:solidFill>
+                  <a:srgbClr val="000000"/>
+                </a:solidFill>
+                <a:latin typeface="Calibri"/>
+              </a:rPr>
+              <a:t> </a:t>
+            </a:r>
+          </a:p>
+          <a:p>
+            <a:pPr marL="342900" indent="-342900">
+              <a:spcAft>
+                <a:spcPts val="400"/>
+              </a:spcAft>
+              <a:buSzPct val="100000"/>
+              <a:buChar char="▸"/>
+            </a:pPr>
+            <a:r>
+              <a:rPr lang="en-US" sz="1100" dirty="0">
+                <a:solidFill>
+                  <a:srgbClr val="E2E8F0"/>
+                </a:solidFill>
+                <a:latin typeface="Calibri" pitchFamily="34" charset="0"/>
+              </a:rPr>
+              <a:t>CA leads with 5 flagged plants; MN follows with 4.</a:t>
+            </a:r>
+          </a:p>
+          <a:p>
+            <a:pPr marL="0" indent="0">
+              <a:spcAft>
+                <a:spcPts val="200"/>
+              </a:spcAft>
+              <a:buNone/>
+            </a:pPr>
+            <a:r>
+              <a:rPr lang="en-US" sz="400" dirty="0">
+                <a:solidFill>
+                  <a:srgbClr val="000000"/>
+                </a:solidFill>
+                <a:latin typeface="Calibri"/>
+              </a:rPr>
+              <a:t> </a:t>
+            </a:r>
+          </a:p>
+          <a:p>
+            <a:pPr marL="342900" indent="-342900">
+              <a:spcAft>
+                <a:spcPts val="400"/>
+              </a:spcAft>
+              <a:buSzPct val="100000"/>
+              <a:buChar char="▸"/>
+            </a:pPr>
+            <a:r>
+              <a:rPr lang="en-US" sz="1100" dirty="0">
+                <a:solidFill>
+                  <a:srgbClr val="E2E8F0"/>
+                </a:solidFill>
+                <a:latin typeface="Calibri" pitchFamily="34" charset="0"/>
+              </a:rPr>
+              <a:t>HYDRO scores lowest — consistent with its zero-emissions profile and clean visual signal.</a:t>
+            </a:r>
+          </a:p>
+        </p:txBody>
+      </p:sp>
+      <p:sp>
+        <p:nvSpPr>
+          <p:cNvPr id="9" name="weightsbg"/>
+          <p:cNvSpPr/>
+          <p:nvPr/>
+        </p:nvSpPr>
+        <p:spPr>
+          <a:xfrm>
+            <a:off x="457200" y="4503960"/>
+            <a:ext cx="11247120" cy="1645680"/>
+          </a:xfrm>
+          <a:prstGeom prst="rect">
+            <a:avLst/>
+          </a:prstGeom>
+          <a:solidFill>
+            <a:srgbClr val="13243A"/>
+          </a:solidFill>
+          <a:ln w="12700">
+            <a:solidFill>
+              <a:srgbClr val="13243A"/>
+            </a:solidFill>
+          </a:ln>
+        </p:spPr>
+        <p:txBody>
+          <a:bodyPr/>
+          <a:lstStyle/>
+          <a:p>
+            <a:endParaRPr lang="en-US"/>
+          </a:p>
+        </p:txBody>
+      </p:sp>
+      <p:sp>
+        <p:nvSpPr>
+          <p:cNvPr id="10" name="weightsside"/>
+          <p:cNvSpPr/>
+          <p:nvPr/>
+        </p:nvSpPr>
+        <p:spPr>
+          <a:xfrm>
+            <a:off x="457200" y="4503960"/>
+            <a:ext cx="73152" cy="1645680"/>
+          </a:xfrm>
+          <a:prstGeom prst="rect">
+            <a:avLst/>
+          </a:prstGeom>
+          <a:solidFill>
+            <a:srgbClr val="F59E0B"/>
+          </a:solidFill>
+          <a:ln w="12700">
+            <a:solidFill>
+              <a:srgbClr val="F59E0B"/>
+            </a:solidFill>
+          </a:ln>
+        </p:spPr>
+        <p:txBody>
+          <a:bodyPr/>
+          <a:lstStyle/>
+          <a:p>
+            <a:endParaRPr lang="en-US"/>
+          </a:p>
+        </p:txBody>
+      </p:sp>
+      <p:sp>
+        <p:nvSpPr>
+          <p:cNvPr id="11" name="weightslbl"/>
+          <p:cNvSpPr/>
+          <p:nvPr/>
+        </p:nvSpPr>
+        <p:spPr>
+          <a:xfrm>
+            <a:off x="685800" y="4595400"/>
+            <a:ext cx="11018520" cy="274320"/>
+          </a:xfrm>
+          <a:prstGeom prst="rect">
+            <a:avLst/>
+          </a:prstGeom>
+          <a:noFill/>
+          <a:ln/>
+        </p:spPr>
+        <p:txBody>
+          <a:bodyPr wrap="square" lIns="0" tIns="0" rIns="0" bIns="0" rtlCol="0" anchor="ctr"/>
+          <a:lstStyle/>
+          <a:p>
+            <a:pPr marL="0" indent="0">
+              <a:buNone/>
+            </a:pPr>
+            <a:r>
+              <a:rPr lang="en-US" sz="1100" b="1" kern="0" spc="300" dirty="0">
+                <a:solidFill>
+                  <a:srgbClr val="F59E0B"/>
+                </a:solidFill>
+                <a:latin typeface="Calibri" pitchFamily="34" charset="0"/>
+              </a:rPr>
+              <a:t>ENSEMBLE WEIGHTS  ·  Residual Z-score 40%  ·  Isolation Forest 25%  ·  One-Class SVM 20%  ·  MC Dropout Uncertainty 15%</a:t>
+            </a:r>
+          </a:p>
+        </p:txBody>
+      </p:sp>
+      <p:sp>
+        <p:nvSpPr>
+          <p:cNvPr id="12" name="weightstext"/>
+          <p:cNvSpPr/>
+          <p:nvPr/>
+        </p:nvSpPr>
+        <p:spPr>
+          <a:xfrm>
+            <a:off x="685800" y="4961160"/>
+            <a:ext cx="11018520" cy="914400"/>
+          </a:xfrm>
+          <a:prstGeom prst="rect">
+            <a:avLst/>
+          </a:prstGeom>
+          <a:noFill/>
+          <a:ln/>
+        </p:spPr>
+        <p:txBody>
+          <a:bodyPr wrap="square" lIns="0" tIns="0" rIns="0" bIns="0" rtlCol="0" anchor="t"/>
+          <a:lstStyle/>
+          <a:p>
+            <a:pPr marL="0" indent="0">
+              <a:buNone/>
+            </a:pPr>
+            <a:r>
+              <a:rPr lang="en-US" sz="1200" dirty="0">
+                <a:solidFill>
+                  <a:srgbClr val="E2E8F0"/>
+                </a:solidFill>
+                <a:latin typeface="Calibri" pitchFamily="34" charset="0"/>
+              </a:rPr>
+              <a:t>Convergent evidence from all four signals is required before a facility appears on the watchlist — no single detector can flag a plant alone. The full ranked watchlist (4,435 plants) is available in </a:t>
+            </a:r>
+            <a:r>
+              <a:rPr lang="en-US" sz="1200" b="1" dirty="0">
+                <a:solidFill>
+                  <a:srgbClr val="2DD4BF"/>
+                </a:solidFill>
+                <a:latin typeface="Calibri" pitchFamily="34" charset="0"/>
+              </a:rPr>
+              <a:t>anomaly_watchlist.csv</a:t>
+            </a:r>
+            <a:r>
+              <a:rPr lang="en-US" sz="1200" dirty="0">
+                <a:solidFill>
+                  <a:srgbClr val="E2E8F0"/>
+                </a:solidFill>
+                <a:latin typeface="Calibri" pitchFamily="34" charset="0"/>
+              </a:rPr>
+              <a:t> for regulatory partner review.</a:t>
+            </a:r>
+          </a:p>
+        </p:txBody>
+      </p:sp>
+      <p:sp>
+        <p:nvSpPr>
+          <p:cNvPr id="13" name="footer"/>
+          <p:cNvSpPr/>
+          <p:nvPr/>
+        </p:nvSpPr>
+        <p:spPr>
+          <a:xfrm>
+            <a:off x="457200" y="6492240"/>
+            <a:ext cx="7315200" cy="274320"/>
+          </a:xfrm>
+          <a:prstGeom prst="rect">
+            <a:avLst/>
+          </a:prstGeom>
+          <a:noFill/>
+          <a:ln/>
+        </p:spPr>
+        <p:txBody>
+          <a:bodyPr wrap="square" lIns="0" tIns="0" rIns="0" bIns="0" rtlCol="0" anchor="ctr"/>
+          <a:lstStyle/>
+          <a:p>
+            <a:pPr marL="0" indent="0">
+              <a:buNone/>
+            </a:pPr>
+            <a:r>
+              <a:rPr lang="en-US" sz="900" dirty="0">
+                <a:solidFill>
+                  <a:srgbClr val="64748B"/>
+                </a:solidFill>
+                <a:latin typeface="Calibri" pitchFamily="34" charset="0"/>
+              </a:rPr>
+              <a:t>Emissions from Above  ·  Scott · Sen · Ronquillo · Rodriguez</a:t>
+            </a:r>
+          </a:p>
+        </p:txBody>
+      </p:sp>
+      <p:sp>
+        <p:nvSpPr>
+          <p:cNvPr id="14" name="pagenum"/>
+          <p:cNvSpPr/>
+          <p:nvPr/>
+        </p:nvSpPr>
+        <p:spPr>
+          <a:xfrm>
+            <a:off x="10972800" y="6492240"/>
+            <a:ext cx="731520" cy="274320"/>
+          </a:xfrm>
+          <a:prstGeom prst="rect">
+            <a:avLst/>
+          </a:prstGeom>
+          <a:noFill/>
+          <a:ln/>
+        </p:spPr>
+        <p:txBody>
+          <a:bodyPr wrap="square" lIns="0" tIns="0" rIns="0" bIns="0" rtlCol="0" anchor="ctr"/>
+          <a:lstStyle/>
+          <a:p>
+            <a:pPr marL="0" indent="0" algn="r">
+              <a:buNone/>
+            </a:pPr>
+            <a:r>
+              <a:rPr lang="en-US" sz="900" dirty="0">
+                <a:solidFill>
+                  <a:srgbClr val="64748B"/>
+                </a:solidFill>
+                <a:latin typeface="Calibri" pitchFamily="34" charset="0"/>
+              </a:rPr>
+              <a:t>12 / 12</a:t>
             </a:r>
           </a:p>
         </p:txBody>
